--- a/topic02-understanding-class-definitions/unit-1/talk-1/class-definitions.pptx
+++ b/topic02-understanding-class-definitions/unit-1/talk-1/class-definitions.pptx
@@ -2,7 +2,7 @@
 <file path=ppt/presentation.xml><?xml version="1.0" encoding="utf-8"?>
 <p:presentation xmlns:a="http://schemas.openxmlformats.org/drawingml/2006/main" xmlns:r="http://schemas.openxmlformats.org/officeDocument/2006/relationships" xmlns:p="http://schemas.openxmlformats.org/presentationml/2006/main" saveSubsetFonts="1">
   <p:sldMasterIdLst>
-    <p:sldMasterId id="2147483940" r:id="rId1"/>
+    <p:sldMasterId id="2147483956" r:id="rId1"/>
   </p:sldMasterIdLst>
   <p:notesMasterIdLst>
     <p:notesMasterId r:id="rId19"/>
@@ -497,14 +497,14 @@
           </a:ln>
           <a:extLst>
             <a:ext uri="{909E8E84-426E-40dd-AFC4-6F175D3DCCD1}">
-              <a14:hiddenFill xmlns="" xmlns:a14="http://schemas.microsoft.com/office/drawing/2010/main">
+              <a14:hiddenFill xmlns:a14="http://schemas.microsoft.com/office/drawing/2010/main" xmlns="">
                 <a:solidFill>
                   <a:srgbClr val="FFFFFF"/>
                 </a:solidFill>
               </a14:hiddenFill>
             </a:ext>
             <a:ext uri="{FAA26D3D-D897-4be2-8F04-BA451C77F1D7}">
-              <ma14:placeholderFlag xmlns="" xmlns:ma14="http://schemas.microsoft.com/office/mac/drawingml/2011/main" val="1"/>
+              <ma14:placeholderFlag xmlns:ma14="http://schemas.microsoft.com/office/mac/drawingml/2011/main" xmlns="" val="1"/>
             </a:ext>
           </a:extLst>
         </p:spPr>
@@ -848,14 +848,14 @@
           <a:noFill/>
           <a:extLst>
             <a:ext uri="{909E8E84-426E-40dd-AFC4-6F175D3DCCD1}">
-              <a14:hiddenFill xmlns="" xmlns:a14="http://schemas.microsoft.com/office/drawing/2010/main">
+              <a14:hiddenFill xmlns:a14="http://schemas.microsoft.com/office/drawing/2010/main" xmlns="">
                 <a:solidFill>
                   <a:srgbClr val="FFFFFF"/>
                 </a:solidFill>
               </a14:hiddenFill>
             </a:ext>
             <a:ext uri="{91240B29-F687-4f45-9708-019B960494DF}">
-              <a14:hiddenLine xmlns="" xmlns:a14="http://schemas.microsoft.com/office/drawing/2010/main" w="9525">
+              <a14:hiddenLine xmlns:a14="http://schemas.microsoft.com/office/drawing/2010/main" xmlns="" w="9525">
                 <a:solidFill>
                   <a:srgbClr val="000000"/>
                 </a:solidFill>
@@ -1003,14 +1003,14 @@
           <a:noFill/>
           <a:extLst>
             <a:ext uri="{909E8E84-426E-40dd-AFC4-6F175D3DCCD1}">
-              <a14:hiddenFill xmlns="" xmlns:a14="http://schemas.microsoft.com/office/drawing/2010/main">
+              <a14:hiddenFill xmlns:a14="http://schemas.microsoft.com/office/drawing/2010/main" xmlns="">
                 <a:solidFill>
                   <a:srgbClr val="FFFFFF"/>
                 </a:solidFill>
               </a14:hiddenFill>
             </a:ext>
             <a:ext uri="{91240B29-F687-4f45-9708-019B960494DF}">
-              <a14:hiddenLine xmlns="" xmlns:a14="http://schemas.microsoft.com/office/drawing/2010/main" w="9525">
+              <a14:hiddenLine xmlns:a14="http://schemas.microsoft.com/office/drawing/2010/main" xmlns="" w="9525">
                 <a:solidFill>
                   <a:srgbClr val="000000"/>
                 </a:solidFill>
@@ -1158,14 +1158,14 @@
           <a:noFill/>
           <a:extLst>
             <a:ext uri="{909E8E84-426E-40dd-AFC4-6F175D3DCCD1}">
-              <a14:hiddenFill xmlns="" xmlns:a14="http://schemas.microsoft.com/office/drawing/2010/main">
+              <a14:hiddenFill xmlns:a14="http://schemas.microsoft.com/office/drawing/2010/main" xmlns="">
                 <a:solidFill>
                   <a:srgbClr val="FFFFFF"/>
                 </a:solidFill>
               </a14:hiddenFill>
             </a:ext>
             <a:ext uri="{91240B29-F687-4f45-9708-019B960494DF}">
-              <a14:hiddenLine xmlns="" xmlns:a14="http://schemas.microsoft.com/office/drawing/2010/main" w="9525">
+              <a14:hiddenLine xmlns:a14="http://schemas.microsoft.com/office/drawing/2010/main" xmlns="" w="9525">
                 <a:solidFill>
                   <a:srgbClr val="000000"/>
                 </a:solidFill>
@@ -1337,7 +1337,7 @@
         <p:spPr>
           <a:extLst>
             <a:ext uri="{FAA26D3D-D897-4be2-8F04-BA451C77F1D7}">
-              <ma14:placeholderFlag xmlns="" xmlns:ma14="http://schemas.microsoft.com/office/mac/drawingml/2011/main" val="1"/>
+              <ma14:placeholderFlag xmlns:ma14="http://schemas.microsoft.com/office/mac/drawingml/2011/main" xmlns="" val="1"/>
             </a:ext>
           </a:extLst>
         </p:spPr>
@@ -1399,14 +1399,14 @@
           <a:noFill/>
           <a:extLst>
             <a:ext uri="{909E8E84-426E-40dd-AFC4-6F175D3DCCD1}">
-              <a14:hiddenFill xmlns="" xmlns:a14="http://schemas.microsoft.com/office/drawing/2010/main">
+              <a14:hiddenFill xmlns:a14="http://schemas.microsoft.com/office/drawing/2010/main" xmlns="">
                 <a:solidFill>
                   <a:srgbClr val="FFFFFF"/>
                 </a:solidFill>
               </a14:hiddenFill>
             </a:ext>
             <a:ext uri="{91240B29-F687-4f45-9708-019B960494DF}">
-              <a14:hiddenLine xmlns="" xmlns:a14="http://schemas.microsoft.com/office/drawing/2010/main" w="9525">
+              <a14:hiddenLine xmlns:a14="http://schemas.microsoft.com/office/drawing/2010/main" xmlns="" w="9525">
                 <a:solidFill>
                   <a:srgbClr val="000000"/>
                 </a:solidFill>
@@ -1554,14 +1554,14 @@
           <a:noFill/>
           <a:extLst>
             <a:ext uri="{909E8E84-426E-40dd-AFC4-6F175D3DCCD1}">
-              <a14:hiddenFill xmlns="" xmlns:a14="http://schemas.microsoft.com/office/drawing/2010/main">
+              <a14:hiddenFill xmlns:a14="http://schemas.microsoft.com/office/drawing/2010/main" xmlns="">
                 <a:solidFill>
                   <a:srgbClr val="FFFFFF"/>
                 </a:solidFill>
               </a14:hiddenFill>
             </a:ext>
             <a:ext uri="{91240B29-F687-4f45-9708-019B960494DF}">
-              <a14:hiddenLine xmlns="" xmlns:a14="http://schemas.microsoft.com/office/drawing/2010/main" w="9525">
+              <a14:hiddenLine xmlns:a14="http://schemas.microsoft.com/office/drawing/2010/main" xmlns="" w="9525">
                 <a:solidFill>
                   <a:srgbClr val="000000"/>
                 </a:solidFill>
@@ -1709,14 +1709,14 @@
           <a:noFill/>
           <a:extLst>
             <a:ext uri="{909E8E84-426E-40dd-AFC4-6F175D3DCCD1}">
-              <a14:hiddenFill xmlns="" xmlns:a14="http://schemas.microsoft.com/office/drawing/2010/main">
+              <a14:hiddenFill xmlns:a14="http://schemas.microsoft.com/office/drawing/2010/main" xmlns="">
                 <a:solidFill>
                   <a:srgbClr val="FFFFFF"/>
                 </a:solidFill>
               </a14:hiddenFill>
             </a:ext>
             <a:ext uri="{91240B29-F687-4f45-9708-019B960494DF}">
-              <a14:hiddenLine xmlns="" xmlns:a14="http://schemas.microsoft.com/office/drawing/2010/main" w="9525">
+              <a14:hiddenLine xmlns:a14="http://schemas.microsoft.com/office/drawing/2010/main" xmlns="" w="9525">
                 <a:solidFill>
                   <a:srgbClr val="000000"/>
                 </a:solidFill>
@@ -1888,7 +1888,7 @@
         <p:spPr>
           <a:extLst>
             <a:ext uri="{FAA26D3D-D897-4be2-8F04-BA451C77F1D7}">
-              <ma14:placeholderFlag xmlns="" xmlns:ma14="http://schemas.microsoft.com/office/mac/drawingml/2011/main" val="1"/>
+              <ma14:placeholderFlag xmlns:ma14="http://schemas.microsoft.com/office/mac/drawingml/2011/main" xmlns="" val="1"/>
             </a:ext>
           </a:extLst>
         </p:spPr>
@@ -1950,14 +1950,14 @@
           <a:noFill/>
           <a:extLst>
             <a:ext uri="{909E8E84-426E-40dd-AFC4-6F175D3DCCD1}">
-              <a14:hiddenFill xmlns="" xmlns:a14="http://schemas.microsoft.com/office/drawing/2010/main">
+              <a14:hiddenFill xmlns:a14="http://schemas.microsoft.com/office/drawing/2010/main" xmlns="">
                 <a:solidFill>
                   <a:srgbClr val="FFFFFF"/>
                 </a:solidFill>
               </a14:hiddenFill>
             </a:ext>
             <a:ext uri="{91240B29-F687-4f45-9708-019B960494DF}">
-              <a14:hiddenLine xmlns="" xmlns:a14="http://schemas.microsoft.com/office/drawing/2010/main" w="9525">
+              <a14:hiddenLine xmlns:a14="http://schemas.microsoft.com/office/drawing/2010/main" xmlns="" w="9525">
                 <a:solidFill>
                   <a:srgbClr val="000000"/>
                 </a:solidFill>
@@ -2105,14 +2105,14 @@
           <a:noFill/>
           <a:extLst>
             <a:ext uri="{909E8E84-426E-40dd-AFC4-6F175D3DCCD1}">
-              <a14:hiddenFill xmlns="" xmlns:a14="http://schemas.microsoft.com/office/drawing/2010/main">
+              <a14:hiddenFill xmlns:a14="http://schemas.microsoft.com/office/drawing/2010/main" xmlns="">
                 <a:solidFill>
                   <a:srgbClr val="FFFFFF"/>
                 </a:solidFill>
               </a14:hiddenFill>
             </a:ext>
             <a:ext uri="{91240B29-F687-4f45-9708-019B960494DF}">
-              <a14:hiddenLine xmlns="" xmlns:a14="http://schemas.microsoft.com/office/drawing/2010/main" w="9525">
+              <a14:hiddenLine xmlns:a14="http://schemas.microsoft.com/office/drawing/2010/main" xmlns="" w="9525">
                 <a:solidFill>
                   <a:srgbClr val="000000"/>
                 </a:solidFill>
@@ -2260,14 +2260,14 @@
           <a:noFill/>
           <a:extLst>
             <a:ext uri="{909E8E84-426E-40dd-AFC4-6F175D3DCCD1}">
-              <a14:hiddenFill xmlns="" xmlns:a14="http://schemas.microsoft.com/office/drawing/2010/main">
+              <a14:hiddenFill xmlns:a14="http://schemas.microsoft.com/office/drawing/2010/main" xmlns="">
                 <a:solidFill>
                   <a:srgbClr val="FFFFFF"/>
                 </a:solidFill>
               </a14:hiddenFill>
             </a:ext>
             <a:ext uri="{91240B29-F687-4f45-9708-019B960494DF}">
-              <a14:hiddenLine xmlns="" xmlns:a14="http://schemas.microsoft.com/office/drawing/2010/main" w="9525">
+              <a14:hiddenLine xmlns:a14="http://schemas.microsoft.com/office/drawing/2010/main" xmlns="" w="9525">
                 <a:solidFill>
                   <a:srgbClr val="000000"/>
                 </a:solidFill>
@@ -2439,7 +2439,7 @@
         <p:spPr>
           <a:extLst>
             <a:ext uri="{FAA26D3D-D897-4be2-8F04-BA451C77F1D7}">
-              <ma14:placeholderFlag xmlns="" xmlns:ma14="http://schemas.microsoft.com/office/mac/drawingml/2011/main" val="1"/>
+              <ma14:placeholderFlag xmlns:ma14="http://schemas.microsoft.com/office/mac/drawingml/2011/main" xmlns="" val="1"/>
             </a:ext>
           </a:extLst>
         </p:spPr>
@@ -2501,14 +2501,14 @@
           <a:noFill/>
           <a:extLst>
             <a:ext uri="{909E8E84-426E-40dd-AFC4-6F175D3DCCD1}">
-              <a14:hiddenFill xmlns="" xmlns:a14="http://schemas.microsoft.com/office/drawing/2010/main">
+              <a14:hiddenFill xmlns:a14="http://schemas.microsoft.com/office/drawing/2010/main" xmlns="">
                 <a:solidFill>
                   <a:srgbClr val="FFFFFF"/>
                 </a:solidFill>
               </a14:hiddenFill>
             </a:ext>
             <a:ext uri="{91240B29-F687-4f45-9708-019B960494DF}">
-              <a14:hiddenLine xmlns="" xmlns:a14="http://schemas.microsoft.com/office/drawing/2010/main" w="9525">
+              <a14:hiddenLine xmlns:a14="http://schemas.microsoft.com/office/drawing/2010/main" xmlns="" w="9525">
                 <a:solidFill>
                   <a:srgbClr val="000000"/>
                 </a:solidFill>
@@ -2656,14 +2656,14 @@
           <a:noFill/>
           <a:extLst>
             <a:ext uri="{909E8E84-426E-40dd-AFC4-6F175D3DCCD1}">
-              <a14:hiddenFill xmlns="" xmlns:a14="http://schemas.microsoft.com/office/drawing/2010/main">
+              <a14:hiddenFill xmlns:a14="http://schemas.microsoft.com/office/drawing/2010/main" xmlns="">
                 <a:solidFill>
                   <a:srgbClr val="FFFFFF"/>
                 </a:solidFill>
               </a14:hiddenFill>
             </a:ext>
             <a:ext uri="{91240B29-F687-4f45-9708-019B960494DF}">
-              <a14:hiddenLine xmlns="" xmlns:a14="http://schemas.microsoft.com/office/drawing/2010/main" w="9525">
+              <a14:hiddenLine xmlns:a14="http://schemas.microsoft.com/office/drawing/2010/main" xmlns="" w="9525">
                 <a:solidFill>
                   <a:srgbClr val="000000"/>
                 </a:solidFill>
@@ -2811,14 +2811,14 @@
           <a:noFill/>
           <a:extLst>
             <a:ext uri="{909E8E84-426E-40dd-AFC4-6F175D3DCCD1}">
-              <a14:hiddenFill xmlns="" xmlns:a14="http://schemas.microsoft.com/office/drawing/2010/main">
+              <a14:hiddenFill xmlns:a14="http://schemas.microsoft.com/office/drawing/2010/main" xmlns="">
                 <a:solidFill>
                   <a:srgbClr val="FFFFFF"/>
                 </a:solidFill>
               </a14:hiddenFill>
             </a:ext>
             <a:ext uri="{91240B29-F687-4f45-9708-019B960494DF}">
-              <a14:hiddenLine xmlns="" xmlns:a14="http://schemas.microsoft.com/office/drawing/2010/main" w="9525">
+              <a14:hiddenLine xmlns:a14="http://schemas.microsoft.com/office/drawing/2010/main" xmlns="" w="9525">
                 <a:solidFill>
                   <a:srgbClr val="000000"/>
                 </a:solidFill>
@@ -2990,7 +2990,7 @@
         <p:spPr>
           <a:extLst>
             <a:ext uri="{FAA26D3D-D897-4be2-8F04-BA451C77F1D7}">
-              <ma14:placeholderFlag xmlns="" xmlns:ma14="http://schemas.microsoft.com/office/mac/drawingml/2011/main" val="1"/>
+              <ma14:placeholderFlag xmlns:ma14="http://schemas.microsoft.com/office/mac/drawingml/2011/main" xmlns="" val="1"/>
             </a:ext>
           </a:extLst>
         </p:spPr>
@@ -3052,14 +3052,14 @@
           <a:noFill/>
           <a:extLst>
             <a:ext uri="{909E8E84-426E-40dd-AFC4-6F175D3DCCD1}">
-              <a14:hiddenFill xmlns="" xmlns:a14="http://schemas.microsoft.com/office/drawing/2010/main">
+              <a14:hiddenFill xmlns:a14="http://schemas.microsoft.com/office/drawing/2010/main" xmlns="">
                 <a:solidFill>
                   <a:srgbClr val="FFFFFF"/>
                 </a:solidFill>
               </a14:hiddenFill>
             </a:ext>
             <a:ext uri="{91240B29-F687-4f45-9708-019B960494DF}">
-              <a14:hiddenLine xmlns="" xmlns:a14="http://schemas.microsoft.com/office/drawing/2010/main" w="9525">
+              <a14:hiddenLine xmlns:a14="http://schemas.microsoft.com/office/drawing/2010/main" xmlns="" w="9525">
                 <a:solidFill>
                   <a:srgbClr val="000000"/>
                 </a:solidFill>
@@ -3207,14 +3207,14 @@
           <a:noFill/>
           <a:extLst>
             <a:ext uri="{909E8E84-426E-40dd-AFC4-6F175D3DCCD1}">
-              <a14:hiddenFill xmlns="" xmlns:a14="http://schemas.microsoft.com/office/drawing/2010/main">
+              <a14:hiddenFill xmlns:a14="http://schemas.microsoft.com/office/drawing/2010/main" xmlns="">
                 <a:solidFill>
                   <a:srgbClr val="FFFFFF"/>
                 </a:solidFill>
               </a14:hiddenFill>
             </a:ext>
             <a:ext uri="{91240B29-F687-4f45-9708-019B960494DF}">
-              <a14:hiddenLine xmlns="" xmlns:a14="http://schemas.microsoft.com/office/drawing/2010/main" w="9525">
+              <a14:hiddenLine xmlns:a14="http://schemas.microsoft.com/office/drawing/2010/main" xmlns="" w="9525">
                 <a:solidFill>
                   <a:srgbClr val="000000"/>
                 </a:solidFill>
@@ -3362,14 +3362,14 @@
           <a:noFill/>
           <a:extLst>
             <a:ext uri="{909E8E84-426E-40dd-AFC4-6F175D3DCCD1}">
-              <a14:hiddenFill xmlns="" xmlns:a14="http://schemas.microsoft.com/office/drawing/2010/main">
+              <a14:hiddenFill xmlns:a14="http://schemas.microsoft.com/office/drawing/2010/main" xmlns="">
                 <a:solidFill>
                   <a:srgbClr val="FFFFFF"/>
                 </a:solidFill>
               </a14:hiddenFill>
             </a:ext>
             <a:ext uri="{91240B29-F687-4f45-9708-019B960494DF}">
-              <a14:hiddenLine xmlns="" xmlns:a14="http://schemas.microsoft.com/office/drawing/2010/main" w="9525">
+              <a14:hiddenLine xmlns:a14="http://schemas.microsoft.com/office/drawing/2010/main" xmlns="" w="9525">
                 <a:solidFill>
                   <a:srgbClr val="000000"/>
                 </a:solidFill>
@@ -3541,7 +3541,7 @@
         <p:spPr>
           <a:extLst>
             <a:ext uri="{FAA26D3D-D897-4be2-8F04-BA451C77F1D7}">
-              <ma14:placeholderFlag xmlns="" xmlns:ma14="http://schemas.microsoft.com/office/mac/drawingml/2011/main" val="1"/>
+              <ma14:placeholderFlag xmlns:ma14="http://schemas.microsoft.com/office/mac/drawingml/2011/main" xmlns="" val="1"/>
             </a:ext>
           </a:extLst>
         </p:spPr>
@@ -3603,14 +3603,14 @@
           <a:noFill/>
           <a:extLst>
             <a:ext uri="{909E8E84-426E-40dd-AFC4-6F175D3DCCD1}">
-              <a14:hiddenFill xmlns="" xmlns:a14="http://schemas.microsoft.com/office/drawing/2010/main">
+              <a14:hiddenFill xmlns:a14="http://schemas.microsoft.com/office/drawing/2010/main" xmlns="">
                 <a:solidFill>
                   <a:srgbClr val="FFFFFF"/>
                 </a:solidFill>
               </a14:hiddenFill>
             </a:ext>
             <a:ext uri="{91240B29-F687-4f45-9708-019B960494DF}">
-              <a14:hiddenLine xmlns="" xmlns:a14="http://schemas.microsoft.com/office/drawing/2010/main" w="9525">
+              <a14:hiddenLine xmlns:a14="http://schemas.microsoft.com/office/drawing/2010/main" xmlns="" w="9525">
                 <a:solidFill>
                   <a:srgbClr val="000000"/>
                 </a:solidFill>
@@ -3758,14 +3758,14 @@
           <a:noFill/>
           <a:extLst>
             <a:ext uri="{909E8E84-426E-40dd-AFC4-6F175D3DCCD1}">
-              <a14:hiddenFill xmlns="" xmlns:a14="http://schemas.microsoft.com/office/drawing/2010/main">
+              <a14:hiddenFill xmlns:a14="http://schemas.microsoft.com/office/drawing/2010/main" xmlns="">
                 <a:solidFill>
                   <a:srgbClr val="FFFFFF"/>
                 </a:solidFill>
               </a14:hiddenFill>
             </a:ext>
             <a:ext uri="{91240B29-F687-4f45-9708-019B960494DF}">
-              <a14:hiddenLine xmlns="" xmlns:a14="http://schemas.microsoft.com/office/drawing/2010/main" w="9525">
+              <a14:hiddenLine xmlns:a14="http://schemas.microsoft.com/office/drawing/2010/main" xmlns="" w="9525">
                 <a:solidFill>
                   <a:srgbClr val="000000"/>
                 </a:solidFill>
@@ -3913,14 +3913,14 @@
           <a:noFill/>
           <a:extLst>
             <a:ext uri="{909E8E84-426E-40dd-AFC4-6F175D3DCCD1}">
-              <a14:hiddenFill xmlns="" xmlns:a14="http://schemas.microsoft.com/office/drawing/2010/main">
+              <a14:hiddenFill xmlns:a14="http://schemas.microsoft.com/office/drawing/2010/main" xmlns="">
                 <a:solidFill>
                   <a:srgbClr val="FFFFFF"/>
                 </a:solidFill>
               </a14:hiddenFill>
             </a:ext>
             <a:ext uri="{91240B29-F687-4f45-9708-019B960494DF}">
-              <a14:hiddenLine xmlns="" xmlns:a14="http://schemas.microsoft.com/office/drawing/2010/main" w="9525">
+              <a14:hiddenLine xmlns:a14="http://schemas.microsoft.com/office/drawing/2010/main" xmlns="" w="9525">
                 <a:solidFill>
                   <a:srgbClr val="000000"/>
                 </a:solidFill>
@@ -4092,7 +4092,7 @@
         <p:spPr>
           <a:extLst>
             <a:ext uri="{FAA26D3D-D897-4be2-8F04-BA451C77F1D7}">
-              <ma14:placeholderFlag xmlns="" xmlns:ma14="http://schemas.microsoft.com/office/mac/drawingml/2011/main" val="1"/>
+              <ma14:placeholderFlag xmlns:ma14="http://schemas.microsoft.com/office/mac/drawingml/2011/main" xmlns="" val="1"/>
             </a:ext>
           </a:extLst>
         </p:spPr>
@@ -4154,14 +4154,14 @@
           <a:noFill/>
           <a:extLst>
             <a:ext uri="{909E8E84-426E-40dd-AFC4-6F175D3DCCD1}">
-              <a14:hiddenFill xmlns="" xmlns:a14="http://schemas.microsoft.com/office/drawing/2010/main">
+              <a14:hiddenFill xmlns:a14="http://schemas.microsoft.com/office/drawing/2010/main" xmlns="">
                 <a:solidFill>
                   <a:srgbClr val="FFFFFF"/>
                 </a:solidFill>
               </a14:hiddenFill>
             </a:ext>
             <a:ext uri="{91240B29-F687-4f45-9708-019B960494DF}">
-              <a14:hiddenLine xmlns="" xmlns:a14="http://schemas.microsoft.com/office/drawing/2010/main" w="9525">
+              <a14:hiddenLine xmlns:a14="http://schemas.microsoft.com/office/drawing/2010/main" xmlns="" w="9525">
                 <a:solidFill>
                   <a:srgbClr val="000000"/>
                 </a:solidFill>
@@ -4309,14 +4309,14 @@
           <a:noFill/>
           <a:extLst>
             <a:ext uri="{909E8E84-426E-40dd-AFC4-6F175D3DCCD1}">
-              <a14:hiddenFill xmlns="" xmlns:a14="http://schemas.microsoft.com/office/drawing/2010/main">
+              <a14:hiddenFill xmlns:a14="http://schemas.microsoft.com/office/drawing/2010/main" xmlns="">
                 <a:solidFill>
                   <a:srgbClr val="FFFFFF"/>
                 </a:solidFill>
               </a14:hiddenFill>
             </a:ext>
             <a:ext uri="{91240B29-F687-4f45-9708-019B960494DF}">
-              <a14:hiddenLine xmlns="" xmlns:a14="http://schemas.microsoft.com/office/drawing/2010/main" w="9525">
+              <a14:hiddenLine xmlns:a14="http://schemas.microsoft.com/office/drawing/2010/main" xmlns="" w="9525">
                 <a:solidFill>
                   <a:srgbClr val="000000"/>
                 </a:solidFill>
@@ -4464,14 +4464,14 @@
           <a:noFill/>
           <a:extLst>
             <a:ext uri="{909E8E84-426E-40dd-AFC4-6F175D3DCCD1}">
-              <a14:hiddenFill xmlns="" xmlns:a14="http://schemas.microsoft.com/office/drawing/2010/main">
+              <a14:hiddenFill xmlns:a14="http://schemas.microsoft.com/office/drawing/2010/main" xmlns="">
                 <a:solidFill>
                   <a:srgbClr val="FFFFFF"/>
                 </a:solidFill>
               </a14:hiddenFill>
             </a:ext>
             <a:ext uri="{91240B29-F687-4f45-9708-019B960494DF}">
-              <a14:hiddenLine xmlns="" xmlns:a14="http://schemas.microsoft.com/office/drawing/2010/main" w="9525">
+              <a14:hiddenLine xmlns:a14="http://schemas.microsoft.com/office/drawing/2010/main" xmlns="" w="9525">
                 <a:solidFill>
                   <a:srgbClr val="000000"/>
                 </a:solidFill>
@@ -4643,7 +4643,7 @@
         <p:spPr>
           <a:extLst>
             <a:ext uri="{FAA26D3D-D897-4be2-8F04-BA451C77F1D7}">
-              <ma14:placeholderFlag xmlns="" xmlns:ma14="http://schemas.microsoft.com/office/mac/drawingml/2011/main" val="1"/>
+              <ma14:placeholderFlag xmlns:ma14="http://schemas.microsoft.com/office/mac/drawingml/2011/main" xmlns="" val="1"/>
             </a:ext>
           </a:extLst>
         </p:spPr>
@@ -4705,14 +4705,14 @@
           <a:noFill/>
           <a:extLst>
             <a:ext uri="{909E8E84-426E-40dd-AFC4-6F175D3DCCD1}">
-              <a14:hiddenFill xmlns="" xmlns:a14="http://schemas.microsoft.com/office/drawing/2010/main">
+              <a14:hiddenFill xmlns:a14="http://schemas.microsoft.com/office/drawing/2010/main" xmlns="">
                 <a:solidFill>
                   <a:srgbClr val="FFFFFF"/>
                 </a:solidFill>
               </a14:hiddenFill>
             </a:ext>
             <a:ext uri="{91240B29-F687-4f45-9708-019B960494DF}">
-              <a14:hiddenLine xmlns="" xmlns:a14="http://schemas.microsoft.com/office/drawing/2010/main" w="9525">
+              <a14:hiddenLine xmlns:a14="http://schemas.microsoft.com/office/drawing/2010/main" xmlns="" w="9525">
                 <a:solidFill>
                   <a:srgbClr val="000000"/>
                 </a:solidFill>
@@ -4860,14 +4860,14 @@
           <a:noFill/>
           <a:extLst>
             <a:ext uri="{909E8E84-426E-40dd-AFC4-6F175D3DCCD1}">
-              <a14:hiddenFill xmlns="" xmlns:a14="http://schemas.microsoft.com/office/drawing/2010/main">
+              <a14:hiddenFill xmlns:a14="http://schemas.microsoft.com/office/drawing/2010/main" xmlns="">
                 <a:solidFill>
                   <a:srgbClr val="FFFFFF"/>
                 </a:solidFill>
               </a14:hiddenFill>
             </a:ext>
             <a:ext uri="{91240B29-F687-4f45-9708-019B960494DF}">
-              <a14:hiddenLine xmlns="" xmlns:a14="http://schemas.microsoft.com/office/drawing/2010/main" w="9525">
+              <a14:hiddenLine xmlns:a14="http://schemas.microsoft.com/office/drawing/2010/main" xmlns="" w="9525">
                 <a:solidFill>
                   <a:srgbClr val="000000"/>
                 </a:solidFill>
@@ -5015,14 +5015,14 @@
           <a:noFill/>
           <a:extLst>
             <a:ext uri="{909E8E84-426E-40dd-AFC4-6F175D3DCCD1}">
-              <a14:hiddenFill xmlns="" xmlns:a14="http://schemas.microsoft.com/office/drawing/2010/main">
+              <a14:hiddenFill xmlns:a14="http://schemas.microsoft.com/office/drawing/2010/main" xmlns="">
                 <a:solidFill>
                   <a:srgbClr val="FFFFFF"/>
                 </a:solidFill>
               </a14:hiddenFill>
             </a:ext>
             <a:ext uri="{91240B29-F687-4f45-9708-019B960494DF}">
-              <a14:hiddenLine xmlns="" xmlns:a14="http://schemas.microsoft.com/office/drawing/2010/main" w="9525">
+              <a14:hiddenLine xmlns:a14="http://schemas.microsoft.com/office/drawing/2010/main" xmlns="" w="9525">
                 <a:solidFill>
                   <a:srgbClr val="000000"/>
                 </a:solidFill>
@@ -5194,7 +5194,7 @@
         <p:spPr>
           <a:extLst>
             <a:ext uri="{FAA26D3D-D897-4be2-8F04-BA451C77F1D7}">
-              <ma14:placeholderFlag xmlns="" xmlns:ma14="http://schemas.microsoft.com/office/mac/drawingml/2011/main" val="1"/>
+              <ma14:placeholderFlag xmlns:ma14="http://schemas.microsoft.com/office/mac/drawingml/2011/main" xmlns="" val="1"/>
             </a:ext>
           </a:extLst>
         </p:spPr>
@@ -5256,14 +5256,14 @@
           <a:noFill/>
           <a:extLst>
             <a:ext uri="{909E8E84-426E-40dd-AFC4-6F175D3DCCD1}">
-              <a14:hiddenFill xmlns="" xmlns:a14="http://schemas.microsoft.com/office/drawing/2010/main">
+              <a14:hiddenFill xmlns:a14="http://schemas.microsoft.com/office/drawing/2010/main" xmlns="">
                 <a:solidFill>
                   <a:srgbClr val="FFFFFF"/>
                 </a:solidFill>
               </a14:hiddenFill>
             </a:ext>
             <a:ext uri="{91240B29-F687-4f45-9708-019B960494DF}">
-              <a14:hiddenLine xmlns="" xmlns:a14="http://schemas.microsoft.com/office/drawing/2010/main" w="9525">
+              <a14:hiddenLine xmlns:a14="http://schemas.microsoft.com/office/drawing/2010/main" xmlns="" w="9525">
                 <a:solidFill>
                   <a:srgbClr val="000000"/>
                 </a:solidFill>
@@ -5411,14 +5411,14 @@
           <a:noFill/>
           <a:extLst>
             <a:ext uri="{909E8E84-426E-40dd-AFC4-6F175D3DCCD1}">
-              <a14:hiddenFill xmlns="" xmlns:a14="http://schemas.microsoft.com/office/drawing/2010/main">
+              <a14:hiddenFill xmlns:a14="http://schemas.microsoft.com/office/drawing/2010/main" xmlns="">
                 <a:solidFill>
                   <a:srgbClr val="FFFFFF"/>
                 </a:solidFill>
               </a14:hiddenFill>
             </a:ext>
             <a:ext uri="{91240B29-F687-4f45-9708-019B960494DF}">
-              <a14:hiddenLine xmlns="" xmlns:a14="http://schemas.microsoft.com/office/drawing/2010/main" w="9525">
+              <a14:hiddenLine xmlns:a14="http://schemas.microsoft.com/office/drawing/2010/main" xmlns="" w="9525">
                 <a:solidFill>
                   <a:srgbClr val="000000"/>
                 </a:solidFill>
@@ -5566,14 +5566,14 @@
           <a:noFill/>
           <a:extLst>
             <a:ext uri="{909E8E84-426E-40dd-AFC4-6F175D3DCCD1}">
-              <a14:hiddenFill xmlns="" xmlns:a14="http://schemas.microsoft.com/office/drawing/2010/main">
+              <a14:hiddenFill xmlns:a14="http://schemas.microsoft.com/office/drawing/2010/main" xmlns="">
                 <a:solidFill>
                   <a:srgbClr val="FFFFFF"/>
                 </a:solidFill>
               </a14:hiddenFill>
             </a:ext>
             <a:ext uri="{91240B29-F687-4f45-9708-019B960494DF}">
-              <a14:hiddenLine xmlns="" xmlns:a14="http://schemas.microsoft.com/office/drawing/2010/main" w="9525">
+              <a14:hiddenLine xmlns:a14="http://schemas.microsoft.com/office/drawing/2010/main" xmlns="" w="9525">
                 <a:solidFill>
                   <a:srgbClr val="000000"/>
                 </a:solidFill>
@@ -5745,7 +5745,7 @@
         <p:spPr>
           <a:extLst>
             <a:ext uri="{FAA26D3D-D897-4be2-8F04-BA451C77F1D7}">
-              <ma14:placeholderFlag xmlns="" xmlns:ma14="http://schemas.microsoft.com/office/mac/drawingml/2011/main" val="1"/>
+              <ma14:placeholderFlag xmlns:ma14="http://schemas.microsoft.com/office/mac/drawingml/2011/main" xmlns="" val="1"/>
             </a:ext>
           </a:extLst>
         </p:spPr>
@@ -5807,14 +5807,14 @@
           <a:noFill/>
           <a:extLst>
             <a:ext uri="{909E8E84-426E-40dd-AFC4-6F175D3DCCD1}">
-              <a14:hiddenFill xmlns="" xmlns:a14="http://schemas.microsoft.com/office/drawing/2010/main">
+              <a14:hiddenFill xmlns:a14="http://schemas.microsoft.com/office/drawing/2010/main" xmlns="">
                 <a:solidFill>
                   <a:srgbClr val="FFFFFF"/>
                 </a:solidFill>
               </a14:hiddenFill>
             </a:ext>
             <a:ext uri="{91240B29-F687-4f45-9708-019B960494DF}">
-              <a14:hiddenLine xmlns="" xmlns:a14="http://schemas.microsoft.com/office/drawing/2010/main" w="9525">
+              <a14:hiddenLine xmlns:a14="http://schemas.microsoft.com/office/drawing/2010/main" xmlns="" w="9525">
                 <a:solidFill>
                   <a:srgbClr val="000000"/>
                 </a:solidFill>
@@ -5962,14 +5962,14 @@
           <a:noFill/>
           <a:extLst>
             <a:ext uri="{909E8E84-426E-40dd-AFC4-6F175D3DCCD1}">
-              <a14:hiddenFill xmlns="" xmlns:a14="http://schemas.microsoft.com/office/drawing/2010/main">
+              <a14:hiddenFill xmlns:a14="http://schemas.microsoft.com/office/drawing/2010/main" xmlns="">
                 <a:solidFill>
                   <a:srgbClr val="FFFFFF"/>
                 </a:solidFill>
               </a14:hiddenFill>
             </a:ext>
             <a:ext uri="{91240B29-F687-4f45-9708-019B960494DF}">
-              <a14:hiddenLine xmlns="" xmlns:a14="http://schemas.microsoft.com/office/drawing/2010/main" w="9525">
+              <a14:hiddenLine xmlns:a14="http://schemas.microsoft.com/office/drawing/2010/main" xmlns="" w="9525">
                 <a:solidFill>
                   <a:srgbClr val="000000"/>
                 </a:solidFill>
@@ -6117,14 +6117,14 @@
           <a:noFill/>
           <a:extLst>
             <a:ext uri="{909E8E84-426E-40dd-AFC4-6F175D3DCCD1}">
-              <a14:hiddenFill xmlns="" xmlns:a14="http://schemas.microsoft.com/office/drawing/2010/main">
+              <a14:hiddenFill xmlns:a14="http://schemas.microsoft.com/office/drawing/2010/main" xmlns="">
                 <a:solidFill>
                   <a:srgbClr val="FFFFFF"/>
                 </a:solidFill>
               </a14:hiddenFill>
             </a:ext>
             <a:ext uri="{91240B29-F687-4f45-9708-019B960494DF}">
-              <a14:hiddenLine xmlns="" xmlns:a14="http://schemas.microsoft.com/office/drawing/2010/main" w="9525">
+              <a14:hiddenLine xmlns:a14="http://schemas.microsoft.com/office/drawing/2010/main" xmlns="" w="9525">
                 <a:solidFill>
                   <a:srgbClr val="000000"/>
                 </a:solidFill>
@@ -6296,7 +6296,7 @@
         <p:spPr>
           <a:extLst>
             <a:ext uri="{FAA26D3D-D897-4be2-8F04-BA451C77F1D7}">
-              <ma14:placeholderFlag xmlns="" xmlns:ma14="http://schemas.microsoft.com/office/mac/drawingml/2011/main" val="1"/>
+              <ma14:placeholderFlag xmlns:ma14="http://schemas.microsoft.com/office/mac/drawingml/2011/main" xmlns="" val="1"/>
             </a:ext>
           </a:extLst>
         </p:spPr>
@@ -6358,14 +6358,14 @@
           <a:noFill/>
           <a:extLst>
             <a:ext uri="{909E8E84-426E-40dd-AFC4-6F175D3DCCD1}">
-              <a14:hiddenFill xmlns="" xmlns:a14="http://schemas.microsoft.com/office/drawing/2010/main">
+              <a14:hiddenFill xmlns:a14="http://schemas.microsoft.com/office/drawing/2010/main" xmlns="">
                 <a:solidFill>
                   <a:srgbClr val="FFFFFF"/>
                 </a:solidFill>
               </a14:hiddenFill>
             </a:ext>
             <a:ext uri="{91240B29-F687-4f45-9708-019B960494DF}">
-              <a14:hiddenLine xmlns="" xmlns:a14="http://schemas.microsoft.com/office/drawing/2010/main" w="9525">
+              <a14:hiddenLine xmlns:a14="http://schemas.microsoft.com/office/drawing/2010/main" xmlns="" w="9525">
                 <a:solidFill>
                   <a:srgbClr val="000000"/>
                 </a:solidFill>
@@ -6513,14 +6513,14 @@
           <a:noFill/>
           <a:extLst>
             <a:ext uri="{909E8E84-426E-40dd-AFC4-6F175D3DCCD1}">
-              <a14:hiddenFill xmlns="" xmlns:a14="http://schemas.microsoft.com/office/drawing/2010/main">
+              <a14:hiddenFill xmlns:a14="http://schemas.microsoft.com/office/drawing/2010/main" xmlns="">
                 <a:solidFill>
                   <a:srgbClr val="FFFFFF"/>
                 </a:solidFill>
               </a14:hiddenFill>
             </a:ext>
             <a:ext uri="{91240B29-F687-4f45-9708-019B960494DF}">
-              <a14:hiddenLine xmlns="" xmlns:a14="http://schemas.microsoft.com/office/drawing/2010/main" w="9525">
+              <a14:hiddenLine xmlns:a14="http://schemas.microsoft.com/office/drawing/2010/main" xmlns="" w="9525">
                 <a:solidFill>
                   <a:srgbClr val="000000"/>
                 </a:solidFill>
@@ -6668,14 +6668,14 @@
           <a:noFill/>
           <a:extLst>
             <a:ext uri="{909E8E84-426E-40dd-AFC4-6F175D3DCCD1}">
-              <a14:hiddenFill xmlns="" xmlns:a14="http://schemas.microsoft.com/office/drawing/2010/main">
+              <a14:hiddenFill xmlns:a14="http://schemas.microsoft.com/office/drawing/2010/main" xmlns="">
                 <a:solidFill>
                   <a:srgbClr val="FFFFFF"/>
                 </a:solidFill>
               </a14:hiddenFill>
             </a:ext>
             <a:ext uri="{91240B29-F687-4f45-9708-019B960494DF}">
-              <a14:hiddenLine xmlns="" xmlns:a14="http://schemas.microsoft.com/office/drawing/2010/main" w="9525">
+              <a14:hiddenLine xmlns:a14="http://schemas.microsoft.com/office/drawing/2010/main" xmlns="" w="9525">
                 <a:solidFill>
                   <a:srgbClr val="000000"/>
                 </a:solidFill>
@@ -6847,7 +6847,7 @@
         <p:spPr>
           <a:extLst>
             <a:ext uri="{FAA26D3D-D897-4be2-8F04-BA451C77F1D7}">
-              <ma14:placeholderFlag xmlns="" xmlns:ma14="http://schemas.microsoft.com/office/mac/drawingml/2011/main" val="1"/>
+              <ma14:placeholderFlag xmlns:ma14="http://schemas.microsoft.com/office/mac/drawingml/2011/main" xmlns="" val="1"/>
             </a:ext>
           </a:extLst>
         </p:spPr>
@@ -6916,7 +6916,7 @@
           <a:lstStyle/>
           <a:p>
             <a:r>
-              <a:rPr lang="en-US"/>
+              <a:rPr lang="en-GB"/>
               <a:t>Click to edit Master title style</a:t>
             </a:r>
             <a:endParaRPr lang="en-US" dirty="0"/>
@@ -7035,7 +7035,7 @@
           </a:lstStyle>
           <a:p>
             <a:r>
-              <a:rPr lang="en-US"/>
+              <a:rPr lang="en-GB"/>
               <a:t>Click to edit Master subtitle style</a:t>
             </a:r>
             <a:endParaRPr lang="en-US" dirty="0"/>
@@ -7059,7 +7059,7 @@
           <a:p>
             <a:fld id="{C764DE79-268F-4C1A-8933-263129D2AF90}" type="datetimeFigureOut">
               <a:rPr lang="en-US" smtClean="0"/>
-              <a:t>9/16/2025</a:t>
+              <a:t>9/19/25</a:t>
             </a:fld>
             <a:endParaRPr lang="en-US" dirty="0"/>
           </a:p>
@@ -7110,7 +7110,7 @@
     </p:spTree>
     <p:extLst>
       <p:ext uri="{BB962C8B-B14F-4D97-AF65-F5344CB8AC3E}">
-        <p14:creationId xmlns:p14="http://schemas.microsoft.com/office/powerpoint/2010/main" val="1157150146"/>
+        <p14:creationId xmlns:p14="http://schemas.microsoft.com/office/powerpoint/2010/main" val="1978560252"/>
       </p:ext>
     </p:extLst>
   </p:cSld>
@@ -7154,9 +7154,10 @@
           <a:lstStyle/>
           <a:p>
             <a:r>
-              <a:rPr lang="en-US"/>
+              <a:rPr lang="en-GB"/>
               <a:t>Click to edit Master title style</a:t>
             </a:r>
+            <a:endParaRPr lang="en-US"/>
           </a:p>
         </p:txBody>
       </p:sp>
@@ -7177,37 +7178,38 @@
           <a:p>
             <a:pPr lvl="0"/>
             <a:r>
-              <a:rPr lang="en-US"/>
+              <a:rPr lang="en-GB"/>
               <a:t>Click to edit Master text styles</a:t>
             </a:r>
           </a:p>
           <a:p>
             <a:pPr lvl="1"/>
             <a:r>
-              <a:rPr lang="en-US"/>
+              <a:rPr lang="en-GB"/>
               <a:t>Second level</a:t>
             </a:r>
           </a:p>
           <a:p>
             <a:pPr lvl="2"/>
             <a:r>
-              <a:rPr lang="en-US"/>
+              <a:rPr lang="en-GB"/>
               <a:t>Third level</a:t>
             </a:r>
           </a:p>
           <a:p>
             <a:pPr lvl="3"/>
             <a:r>
-              <a:rPr lang="en-US"/>
+              <a:rPr lang="en-GB"/>
               <a:t>Fourth level</a:t>
             </a:r>
           </a:p>
           <a:p>
             <a:pPr lvl="4"/>
             <a:r>
-              <a:rPr lang="en-US"/>
+              <a:rPr lang="en-GB"/>
               <a:t>Fifth level</a:t>
             </a:r>
+            <a:endParaRPr lang="en-US"/>
           </a:p>
         </p:txBody>
       </p:sp>
@@ -7228,7 +7230,7 @@
           <a:p>
             <a:fld id="{C764DE79-268F-4C1A-8933-263129D2AF90}" type="datetimeFigureOut">
               <a:rPr lang="en-US" smtClean="0"/>
-              <a:t>9/16/2025</a:t>
+              <a:t>9/19/25</a:t>
             </a:fld>
             <a:endParaRPr lang="en-US" dirty="0"/>
           </a:p>
@@ -7279,7 +7281,7 @@
     </p:spTree>
     <p:extLst>
       <p:ext uri="{BB962C8B-B14F-4D97-AF65-F5344CB8AC3E}">
-        <p14:creationId xmlns:p14="http://schemas.microsoft.com/office/powerpoint/2010/main" val="1388628586"/>
+        <p14:creationId xmlns:p14="http://schemas.microsoft.com/office/powerpoint/2010/main" val="1139762171"/>
       </p:ext>
     </p:extLst>
   </p:cSld>
@@ -7328,9 +7330,10 @@
           <a:lstStyle/>
           <a:p>
             <a:r>
-              <a:rPr lang="en-US"/>
+              <a:rPr lang="en-GB"/>
               <a:t>Click to edit Master title style</a:t>
             </a:r>
+            <a:endParaRPr lang="en-US"/>
           </a:p>
         </p:txBody>
       </p:sp>
@@ -7356,37 +7359,38 @@
           <a:p>
             <a:pPr lvl="0"/>
             <a:r>
-              <a:rPr lang="en-US"/>
+              <a:rPr lang="en-GB"/>
               <a:t>Click to edit Master text styles</a:t>
             </a:r>
           </a:p>
           <a:p>
             <a:pPr lvl="1"/>
             <a:r>
-              <a:rPr lang="en-US"/>
+              <a:rPr lang="en-GB"/>
               <a:t>Second level</a:t>
             </a:r>
           </a:p>
           <a:p>
             <a:pPr lvl="2"/>
             <a:r>
-              <a:rPr lang="en-US"/>
+              <a:rPr lang="en-GB"/>
               <a:t>Third level</a:t>
             </a:r>
           </a:p>
           <a:p>
             <a:pPr lvl="3"/>
             <a:r>
-              <a:rPr lang="en-US"/>
+              <a:rPr lang="en-GB"/>
               <a:t>Fourth level</a:t>
             </a:r>
           </a:p>
           <a:p>
             <a:pPr lvl="4"/>
             <a:r>
-              <a:rPr lang="en-US"/>
+              <a:rPr lang="en-GB"/>
               <a:t>Fifth level</a:t>
             </a:r>
+            <a:endParaRPr lang="en-US"/>
           </a:p>
         </p:txBody>
       </p:sp>
@@ -7407,7 +7411,7 @@
           <a:p>
             <a:fld id="{C764DE79-268F-4C1A-8933-263129D2AF90}" type="datetimeFigureOut">
               <a:rPr lang="en-US" smtClean="0"/>
-              <a:t>9/16/2025</a:t>
+              <a:t>9/19/25</a:t>
             </a:fld>
             <a:endParaRPr lang="en-US" dirty="0"/>
           </a:p>
@@ -7458,7 +7462,7 @@
     </p:spTree>
     <p:extLst>
       <p:ext uri="{BB962C8B-B14F-4D97-AF65-F5344CB8AC3E}">
-        <p14:creationId xmlns:p14="http://schemas.microsoft.com/office/powerpoint/2010/main" val="1011809980"/>
+        <p14:creationId xmlns:p14="http://schemas.microsoft.com/office/powerpoint/2010/main" val="227806915"/>
       </p:ext>
     </p:extLst>
   </p:cSld>
@@ -7506,7 +7510,7 @@
           <a:lstStyle/>
           <a:p>
             <a:r>
-              <a:rPr lang="en-US"/>
+              <a:rPr lang="en-GB"/>
               <a:t>Click to edit Master title style</a:t>
             </a:r>
             <a:endParaRPr/>
@@ -7534,35 +7538,35 @@
           <a:p>
             <a:pPr lvl="0"/>
             <a:r>
-              <a:rPr lang="en-US"/>
+              <a:rPr lang="en-GB"/>
               <a:t>Click to edit Master text styles</a:t>
             </a:r>
           </a:p>
           <a:p>
             <a:pPr lvl="1"/>
             <a:r>
-              <a:rPr lang="en-US"/>
+              <a:rPr lang="en-GB"/>
               <a:t>Second level</a:t>
             </a:r>
           </a:p>
           <a:p>
             <a:pPr lvl="2"/>
             <a:r>
-              <a:rPr lang="en-US"/>
+              <a:rPr lang="en-GB"/>
               <a:t>Third level</a:t>
             </a:r>
           </a:p>
           <a:p>
             <a:pPr lvl="3"/>
             <a:r>
-              <a:rPr lang="en-US"/>
+              <a:rPr lang="en-GB"/>
               <a:t>Fourth level</a:t>
             </a:r>
           </a:p>
           <a:p>
             <a:pPr lvl="4"/>
             <a:r>
-              <a:rPr lang="en-US"/>
+              <a:rPr lang="en-GB"/>
               <a:t>Fifth level</a:t>
             </a:r>
             <a:endParaRPr/>
@@ -7599,7 +7603,7 @@
     </p:spTree>
     <p:extLst>
       <p:ext uri="{BB962C8B-B14F-4D97-AF65-F5344CB8AC3E}">
-        <p14:creationId xmlns:p14="http://schemas.microsoft.com/office/powerpoint/2010/main" val="1876850764"/>
+        <p14:creationId xmlns:p14="http://schemas.microsoft.com/office/powerpoint/2010/main" val="3034828604"/>
       </p:ext>
     </p:extLst>
   </p:cSld>
@@ -7611,6 +7615,151 @@
 </file>
 
 <file path=ppt/slideLayouts/slideLayout13.xml><?xml version="1.0" encoding="utf-8"?>
+<p:sldLayout xmlns:a="http://schemas.openxmlformats.org/drawingml/2006/main" xmlns:r="http://schemas.openxmlformats.org/officeDocument/2006/relationships" xmlns:p="http://schemas.openxmlformats.org/presentationml/2006/main" showMasterSp="0">
+  <p:cSld name="1_Title Slide">
+    <p:spTree>
+      <p:nvGrpSpPr>
+        <p:cNvPr id="1" name=""/>
+        <p:cNvGrpSpPr/>
+        <p:nvPr/>
+      </p:nvGrpSpPr>
+      <p:grpSpPr>
+        <a:xfrm>
+          <a:off x="0" y="0"/>
+          <a:ext cx="0" cy="0"/>
+          <a:chOff x="0" y="0"/>
+          <a:chExt cx="0" cy="0"/>
+        </a:xfrm>
+      </p:grpSpPr>
+      <p:sp>
+        <p:nvSpPr>
+          <p:cNvPr id="15" name="Title Text"/>
+          <p:cNvSpPr txBox="1">
+            <a:spLocks noGrp="1"/>
+          </p:cNvSpPr>
+          <p:nvPr>
+            <p:ph type="title"/>
+          </p:nvPr>
+        </p:nvSpPr>
+        <p:spPr>
+          <a:xfrm>
+            <a:off x="863600" y="2286000"/>
+            <a:ext cx="10464801" cy="1143001"/>
+          </a:xfrm>
+          <a:prstGeom prst="rect">
+            <a:avLst/>
+          </a:prstGeom>
+        </p:spPr>
+        <p:txBody>
+          <a:bodyPr/>
+          <a:lstStyle/>
+          <a:p>
+            <a:r>
+              <a:rPr lang="en-GB"/>
+              <a:t>Click to edit Master title style</a:t>
+            </a:r>
+            <a:endParaRPr dirty="0"/>
+          </a:p>
+        </p:txBody>
+      </p:sp>
+      <p:sp>
+        <p:nvSpPr>
+          <p:cNvPr id="16" name="Subtitle"/>
+          <p:cNvSpPr txBox="1">
+            <a:spLocks noGrp="1"/>
+          </p:cNvSpPr>
+          <p:nvPr>
+            <p:ph type="body" sz="quarter" idx="22"/>
+          </p:nvPr>
+        </p:nvSpPr>
+        <p:spPr>
+          <a:xfrm>
+            <a:off x="957115" y="3465604"/>
+            <a:ext cx="10134430" cy="846384"/>
+          </a:xfrm>
+          <a:prstGeom prst="rect">
+            <a:avLst/>
+          </a:prstGeom>
+        </p:spPr>
+        <p:txBody>
+          <a:bodyPr anchor="ctr">
+            <a:spAutoFit/>
+          </a:bodyPr>
+          <a:lstStyle>
+            <a:lvl1pPr marL="0" indent="0" algn="ctr">
+              <a:spcBef>
+                <a:spcPts val="0"/>
+              </a:spcBef>
+              <a:buClrTx/>
+              <a:buSzTx/>
+              <a:buFontTx/>
+              <a:buNone/>
+              <a:defRPr>
+                <a:solidFill>
+                  <a:srgbClr val="2F4468"/>
+                </a:solidFill>
+              </a:defRPr>
+            </a:lvl1pPr>
+          </a:lstStyle>
+          <a:p>
+            <a:pPr lvl="0"/>
+            <a:r>
+              <a:rPr lang="en-GB"/>
+              <a:t>Click to edit Master text styles</a:t>
+            </a:r>
+          </a:p>
+        </p:txBody>
+      </p:sp>
+      <p:sp>
+        <p:nvSpPr>
+          <p:cNvPr id="17" name="Slide Number"/>
+          <p:cNvSpPr txBox="1">
+            <a:spLocks noGrp="1"/>
+          </p:cNvSpPr>
+          <p:nvPr>
+            <p:ph type="sldNum" sz="quarter" idx="2"/>
+          </p:nvPr>
+        </p:nvSpPr>
+        <p:spPr>
+          <a:xfrm>
+            <a:off x="11091544" y="6360984"/>
+            <a:ext cx="495649" cy="492440"/>
+          </a:xfrm>
+          <a:prstGeom prst="rect">
+            <a:avLst/>
+          </a:prstGeom>
+        </p:spPr>
+        <p:txBody>
+          <a:bodyPr/>
+          <a:lstStyle>
+            <a:lvl1pPr>
+              <a:defRPr sz="2000"/>
+            </a:lvl1pPr>
+          </a:lstStyle>
+          <a:p>
+            <a:fld id="{86CB4B4D-7CA3-9044-876B-883B54F8677D}" type="slidenum">
+              <a:rPr lang="en-GB" smtClean="0"/>
+              <a:t>‹#›</a:t>
+            </a:fld>
+            <a:endParaRPr lang="en-GB"/>
+          </a:p>
+        </p:txBody>
+      </p:sp>
+    </p:spTree>
+    <p:extLst>
+      <p:ext uri="{BB962C8B-B14F-4D97-AF65-F5344CB8AC3E}">
+        <p14:creationId xmlns:p14="http://schemas.microsoft.com/office/powerpoint/2010/main" val="2780298958"/>
+      </p:ext>
+    </p:extLst>
+  </p:cSld>
+  <p:clrMapOvr>
+    <a:masterClrMapping/>
+  </p:clrMapOvr>
+  <p:transition spd="med"/>
+</p:sldLayout>
+</file>
+
+<file path=ppt/slideLayouts/slideLayout14.xml><?xml version="1.0" encoding="utf-8"?>
 <p:sldLayout xmlns:a="http://schemas.openxmlformats.org/drawingml/2006/main" xmlns:r="http://schemas.openxmlformats.org/officeDocument/2006/relationships" xmlns:p="http://schemas.openxmlformats.org/presentationml/2006/main" type="tx">
   <p:cSld name="Title and Box">
     <p:spTree>
@@ -7692,152 +7841,7 @@
     </p:spTree>
     <p:extLst>
       <p:ext uri="{BB962C8B-B14F-4D97-AF65-F5344CB8AC3E}">
-        <p14:creationId xmlns:p14="http://schemas.microsoft.com/office/powerpoint/2010/main" val="2097884205"/>
-      </p:ext>
-    </p:extLst>
-  </p:cSld>
-  <p:clrMapOvr>
-    <a:masterClrMapping/>
-  </p:clrMapOvr>
-  <p:transition spd="med"/>
-</p:sldLayout>
-</file>
-
-<file path=ppt/slideLayouts/slideLayout14.xml><?xml version="1.0" encoding="utf-8"?>
-<p:sldLayout xmlns:a="http://schemas.openxmlformats.org/drawingml/2006/main" xmlns:r="http://schemas.openxmlformats.org/officeDocument/2006/relationships" xmlns:p="http://schemas.openxmlformats.org/presentationml/2006/main" showMasterSp="0">
-  <p:cSld name="1_Title Slide">
-    <p:spTree>
-      <p:nvGrpSpPr>
-        <p:cNvPr id="1" name=""/>
-        <p:cNvGrpSpPr/>
-        <p:nvPr/>
-      </p:nvGrpSpPr>
-      <p:grpSpPr>
-        <a:xfrm>
-          <a:off x="0" y="0"/>
-          <a:ext cx="0" cy="0"/>
-          <a:chOff x="0" y="0"/>
-          <a:chExt cx="0" cy="0"/>
-        </a:xfrm>
-      </p:grpSpPr>
-      <p:sp>
-        <p:nvSpPr>
-          <p:cNvPr id="15" name="Title Text"/>
-          <p:cNvSpPr txBox="1">
-            <a:spLocks noGrp="1"/>
-          </p:cNvSpPr>
-          <p:nvPr>
-            <p:ph type="title"/>
-          </p:nvPr>
-        </p:nvSpPr>
-        <p:spPr>
-          <a:xfrm>
-            <a:off x="863600" y="2286000"/>
-            <a:ext cx="10464801" cy="1143001"/>
-          </a:xfrm>
-          <a:prstGeom prst="rect">
-            <a:avLst/>
-          </a:prstGeom>
-        </p:spPr>
-        <p:txBody>
-          <a:bodyPr/>
-          <a:lstStyle/>
-          <a:p>
-            <a:r>
-              <a:rPr lang="en-GB"/>
-              <a:t>Click to edit Master title style</a:t>
-            </a:r>
-            <a:endParaRPr dirty="0"/>
-          </a:p>
-        </p:txBody>
-      </p:sp>
-      <p:sp>
-        <p:nvSpPr>
-          <p:cNvPr id="16" name="Subtitle"/>
-          <p:cNvSpPr txBox="1">
-            <a:spLocks noGrp="1"/>
-          </p:cNvSpPr>
-          <p:nvPr>
-            <p:ph type="body" sz="quarter" idx="22"/>
-          </p:nvPr>
-        </p:nvSpPr>
-        <p:spPr>
-          <a:xfrm>
-            <a:off x="957115" y="3465604"/>
-            <a:ext cx="10134430" cy="846384"/>
-          </a:xfrm>
-          <a:prstGeom prst="rect">
-            <a:avLst/>
-          </a:prstGeom>
-        </p:spPr>
-        <p:txBody>
-          <a:bodyPr anchor="ctr">
-            <a:spAutoFit/>
-          </a:bodyPr>
-          <a:lstStyle>
-            <a:lvl1pPr marL="0" indent="0" algn="ctr">
-              <a:spcBef>
-                <a:spcPts val="0"/>
-              </a:spcBef>
-              <a:buClrTx/>
-              <a:buSzTx/>
-              <a:buFontTx/>
-              <a:buNone/>
-              <a:defRPr>
-                <a:solidFill>
-                  <a:srgbClr val="2F4468"/>
-                </a:solidFill>
-              </a:defRPr>
-            </a:lvl1pPr>
-          </a:lstStyle>
-          <a:p>
-            <a:pPr lvl="0"/>
-            <a:r>
-              <a:rPr lang="en-GB"/>
-              <a:t>Click to edit Master text styles</a:t>
-            </a:r>
-          </a:p>
-        </p:txBody>
-      </p:sp>
-      <p:sp>
-        <p:nvSpPr>
-          <p:cNvPr id="17" name="Slide Number"/>
-          <p:cNvSpPr txBox="1">
-            <a:spLocks noGrp="1"/>
-          </p:cNvSpPr>
-          <p:nvPr>
-            <p:ph type="sldNum" sz="quarter" idx="2"/>
-          </p:nvPr>
-        </p:nvSpPr>
-        <p:spPr>
-          <a:xfrm>
-            <a:off x="11091544" y="6360984"/>
-            <a:ext cx="495649" cy="492440"/>
-          </a:xfrm>
-          <a:prstGeom prst="rect">
-            <a:avLst/>
-          </a:prstGeom>
-        </p:spPr>
-        <p:txBody>
-          <a:bodyPr/>
-          <a:lstStyle>
-            <a:lvl1pPr>
-              <a:defRPr sz="2000"/>
-            </a:lvl1pPr>
-          </a:lstStyle>
-          <a:p>
-            <a:fld id="{86CB4B4D-7CA3-9044-876B-883B54F8677D}" type="slidenum">
-              <a:rPr lang="en-GB" smtClean="0"/>
-              <a:t>‹#›</a:t>
-            </a:fld>
-            <a:endParaRPr lang="en-GB"/>
-          </a:p>
-        </p:txBody>
-      </p:sp>
-    </p:spTree>
-    <p:extLst>
-      <p:ext uri="{BB962C8B-B14F-4D97-AF65-F5344CB8AC3E}">
-        <p14:creationId xmlns:p14="http://schemas.microsoft.com/office/powerpoint/2010/main" val="548164564"/>
+        <p14:creationId xmlns:p14="http://schemas.microsoft.com/office/powerpoint/2010/main" val="4103347466"/>
       </p:ext>
     </p:extLst>
   </p:cSld>
@@ -8004,7 +8008,7 @@
     </p:spTree>
     <p:extLst>
       <p:ext uri="{BB962C8B-B14F-4D97-AF65-F5344CB8AC3E}">
-        <p14:creationId xmlns:p14="http://schemas.microsoft.com/office/powerpoint/2010/main" val="2454440101"/>
+        <p14:creationId xmlns:p14="http://schemas.microsoft.com/office/powerpoint/2010/main" val="3769121502"/>
       </p:ext>
     </p:extLst>
   </p:cSld>
@@ -8058,7 +8062,7 @@
           </a:lstStyle>
           <a:p>
             <a:r>
-              <a:rPr lang="en-US"/>
+              <a:rPr lang="en-GB"/>
               <a:t>Click to edit Master title style</a:t>
             </a:r>
             <a:endParaRPr lang="en-US" dirty="0"/>
@@ -8082,37 +8086,38 @@
           <a:p>
             <a:pPr lvl="0"/>
             <a:r>
-              <a:rPr lang="en-US"/>
+              <a:rPr lang="en-GB"/>
               <a:t>Click to edit Master text styles</a:t>
             </a:r>
           </a:p>
           <a:p>
             <a:pPr lvl="1"/>
             <a:r>
-              <a:rPr lang="en-US"/>
+              <a:rPr lang="en-GB"/>
               <a:t>Second level</a:t>
             </a:r>
           </a:p>
           <a:p>
             <a:pPr lvl="2"/>
             <a:r>
-              <a:rPr lang="en-US"/>
+              <a:rPr lang="en-GB"/>
               <a:t>Third level</a:t>
             </a:r>
           </a:p>
           <a:p>
             <a:pPr lvl="3"/>
             <a:r>
-              <a:rPr lang="en-US"/>
+              <a:rPr lang="en-GB"/>
               <a:t>Fourth level</a:t>
             </a:r>
           </a:p>
           <a:p>
             <a:pPr lvl="4"/>
             <a:r>
-              <a:rPr lang="en-US"/>
+              <a:rPr lang="en-GB"/>
               <a:t>Fifth level</a:t>
             </a:r>
+            <a:endParaRPr lang="en-US"/>
           </a:p>
         </p:txBody>
       </p:sp>
@@ -8133,7 +8138,7 @@
           <a:p>
             <a:fld id="{C764DE79-268F-4C1A-8933-263129D2AF90}" type="datetimeFigureOut">
               <a:rPr lang="en-US" smtClean="0"/>
-              <a:t>9/16/2025</a:t>
+              <a:t>9/19/25</a:t>
             </a:fld>
             <a:endParaRPr lang="en-US" dirty="0"/>
           </a:p>
@@ -8263,10 +8268,54 @@
           </a:fontRef>
         </p:style>
       </p:cxnSp>
+      <p:cxnSp>
+        <p:nvCxnSpPr>
+          <p:cNvPr id="9" name="Straight Connector 8">
+            <a:extLst>
+              <a:ext uri="{FF2B5EF4-FFF2-40B4-BE49-F238E27FC236}">
+                <a16:creationId xmlns:a16="http://schemas.microsoft.com/office/drawing/2014/main" id="{9C51F014-A304-3672-EB37-723E4843A104}"/>
+              </a:ext>
+            </a:extLst>
+          </p:cNvPr>
+          <p:cNvCxnSpPr/>
+          <p:nvPr/>
+        </p:nvCxnSpPr>
+        <p:spPr>
+          <a:xfrm>
+            <a:off x="609600" y="1447800"/>
+            <a:ext cx="11074400" cy="0"/>
+          </a:xfrm>
+          <a:prstGeom prst="line">
+            <a:avLst/>
+          </a:prstGeom>
+          <a:ln w="12700">
+            <a:solidFill>
+              <a:schemeClr val="tx1">
+                <a:lumMod val="50000"/>
+                <a:lumOff val="50000"/>
+              </a:schemeClr>
+            </a:solidFill>
+          </a:ln>
+        </p:spPr>
+        <p:style>
+          <a:lnRef idx="1">
+            <a:schemeClr val="accent1"/>
+          </a:lnRef>
+          <a:fillRef idx="0">
+            <a:schemeClr val="accent1"/>
+          </a:fillRef>
+          <a:effectRef idx="0">
+            <a:schemeClr val="accent1"/>
+          </a:effectRef>
+          <a:fontRef idx="minor">
+            <a:schemeClr val="tx1"/>
+          </a:fontRef>
+        </p:style>
+      </p:cxnSp>
     </p:spTree>
     <p:extLst>
       <p:ext uri="{BB962C8B-B14F-4D97-AF65-F5344CB8AC3E}">
-        <p14:creationId xmlns:p14="http://schemas.microsoft.com/office/powerpoint/2010/main" val="932266326"/>
+        <p14:creationId xmlns:p14="http://schemas.microsoft.com/office/powerpoint/2010/main" val="406121491"/>
       </p:ext>
     </p:extLst>
   </p:cSld>
@@ -8318,9 +8367,10 @@
           </a:lstStyle>
           <a:p>
             <a:r>
-              <a:rPr lang="en-US"/>
+              <a:rPr lang="en-GB"/>
               <a:t>Click to edit Master title style</a:t>
             </a:r>
+            <a:endParaRPr lang="en-US"/>
           </a:p>
         </p:txBody>
       </p:sp>
@@ -8437,7 +8487,7 @@
           <a:p>
             <a:pPr lvl="0"/>
             <a:r>
-              <a:rPr lang="en-US"/>
+              <a:rPr lang="en-GB"/>
               <a:t>Click to edit Master text styles</a:t>
             </a:r>
           </a:p>
@@ -8460,7 +8510,7 @@
           <a:p>
             <a:fld id="{C764DE79-268F-4C1A-8933-263129D2AF90}" type="datetimeFigureOut">
               <a:rPr lang="en-US" smtClean="0"/>
-              <a:t>9/16/2025</a:t>
+              <a:t>9/19/25</a:t>
             </a:fld>
             <a:endParaRPr lang="en-US" dirty="0"/>
           </a:p>
@@ -8511,7 +8561,7 @@
     </p:spTree>
     <p:extLst>
       <p:ext uri="{BB962C8B-B14F-4D97-AF65-F5344CB8AC3E}">
-        <p14:creationId xmlns:p14="http://schemas.microsoft.com/office/powerpoint/2010/main" val="3574567067"/>
+        <p14:creationId xmlns:p14="http://schemas.microsoft.com/office/powerpoint/2010/main" val="3900206260"/>
       </p:ext>
     </p:extLst>
   </p:cSld>
@@ -8566,7 +8616,7 @@
           </a:lstStyle>
           <a:p>
             <a:r>
-              <a:rPr lang="en-US"/>
+              <a:rPr lang="en-GB"/>
               <a:t>Click to edit Master title style</a:t>
             </a:r>
             <a:endParaRPr lang="en-US" dirty="0"/>
@@ -8623,37 +8673,38 @@
           <a:p>
             <a:pPr lvl="0"/>
             <a:r>
-              <a:rPr lang="en-US"/>
+              <a:rPr lang="en-GB"/>
               <a:t>Click to edit Master text styles</a:t>
             </a:r>
           </a:p>
           <a:p>
             <a:pPr lvl="1"/>
             <a:r>
-              <a:rPr lang="en-US"/>
+              <a:rPr lang="en-GB"/>
               <a:t>Second level</a:t>
             </a:r>
           </a:p>
           <a:p>
             <a:pPr lvl="2"/>
             <a:r>
-              <a:rPr lang="en-US"/>
+              <a:rPr lang="en-GB"/>
               <a:t>Third level</a:t>
             </a:r>
           </a:p>
           <a:p>
             <a:pPr lvl="3"/>
             <a:r>
-              <a:rPr lang="en-US"/>
+              <a:rPr lang="en-GB"/>
               <a:t>Fourth level</a:t>
             </a:r>
           </a:p>
           <a:p>
             <a:pPr lvl="4"/>
             <a:r>
-              <a:rPr lang="en-US"/>
+              <a:rPr lang="en-GB"/>
               <a:t>Fifth level</a:t>
             </a:r>
+            <a:endParaRPr lang="en-US"/>
           </a:p>
         </p:txBody>
       </p:sp>
@@ -8707,37 +8758,38 @@
           <a:p>
             <a:pPr lvl="0"/>
             <a:r>
-              <a:rPr lang="en-US"/>
+              <a:rPr lang="en-GB"/>
               <a:t>Click to edit Master text styles</a:t>
             </a:r>
           </a:p>
           <a:p>
             <a:pPr lvl="1"/>
             <a:r>
-              <a:rPr lang="en-US"/>
+              <a:rPr lang="en-GB"/>
               <a:t>Second level</a:t>
             </a:r>
           </a:p>
           <a:p>
             <a:pPr lvl="2"/>
             <a:r>
-              <a:rPr lang="en-US"/>
+              <a:rPr lang="en-GB"/>
               <a:t>Third level</a:t>
             </a:r>
           </a:p>
           <a:p>
             <a:pPr lvl="3"/>
             <a:r>
-              <a:rPr lang="en-US"/>
+              <a:rPr lang="en-GB"/>
               <a:t>Fourth level</a:t>
             </a:r>
           </a:p>
           <a:p>
             <a:pPr lvl="4"/>
             <a:r>
-              <a:rPr lang="en-US"/>
+              <a:rPr lang="en-GB"/>
               <a:t>Fifth level</a:t>
             </a:r>
+            <a:endParaRPr lang="en-US"/>
           </a:p>
         </p:txBody>
       </p:sp>
@@ -8758,7 +8810,7 @@
           <a:p>
             <a:fld id="{C764DE79-268F-4C1A-8933-263129D2AF90}" type="datetimeFigureOut">
               <a:rPr lang="en-US" smtClean="0"/>
-              <a:t>9/16/2025</a:t>
+              <a:t>9/19/25</a:t>
             </a:fld>
             <a:endParaRPr lang="en-US" dirty="0"/>
           </a:p>
@@ -8882,10 +8934,51 @@
           </a:fontRef>
         </p:style>
       </p:cxnSp>
+      <p:cxnSp>
+        <p:nvCxnSpPr>
+          <p:cNvPr id="10" name="Straight Connector 9">
+            <a:extLst>
+              <a:ext uri="{FF2B5EF4-FFF2-40B4-BE49-F238E27FC236}">
+                <a16:creationId xmlns:a16="http://schemas.microsoft.com/office/drawing/2014/main" id="{9B64861E-C2E3-2C0F-0C43-CF6F042CC211}"/>
+              </a:ext>
+            </a:extLst>
+          </p:cNvPr>
+          <p:cNvCxnSpPr/>
+          <p:nvPr/>
+        </p:nvCxnSpPr>
+        <p:spPr>
+          <a:xfrm>
+            <a:off x="609600" y="1447800"/>
+            <a:ext cx="11074400" cy="0"/>
+          </a:xfrm>
+          <a:prstGeom prst="line">
+            <a:avLst/>
+          </a:prstGeom>
+          <a:ln w="12700">
+            <a:solidFill>
+              <a:schemeClr val="tx1"/>
+            </a:solidFill>
+          </a:ln>
+        </p:spPr>
+        <p:style>
+          <a:lnRef idx="1">
+            <a:schemeClr val="accent1"/>
+          </a:lnRef>
+          <a:fillRef idx="0">
+            <a:schemeClr val="accent1"/>
+          </a:fillRef>
+          <a:effectRef idx="0">
+            <a:schemeClr val="accent1"/>
+          </a:effectRef>
+          <a:fontRef idx="minor">
+            <a:schemeClr val="tx1"/>
+          </a:fontRef>
+        </p:style>
+      </p:cxnSp>
     </p:spTree>
     <p:extLst>
       <p:ext uri="{BB962C8B-B14F-4D97-AF65-F5344CB8AC3E}">
-        <p14:creationId xmlns:p14="http://schemas.microsoft.com/office/powerpoint/2010/main" val="1478703938"/>
+        <p14:creationId xmlns:p14="http://schemas.microsoft.com/office/powerpoint/2010/main" val="4207909346"/>
       </p:ext>
     </p:extLst>
   </p:cSld>
@@ -8940,7 +9033,7 @@
           </a:lstStyle>
           <a:p>
             <a:r>
-              <a:rPr lang="en-US"/>
+              <a:rPr lang="en-GB"/>
               <a:t>Click to edit Master title style</a:t>
             </a:r>
             <a:endParaRPr lang="en-US" dirty="0"/>
@@ -9006,7 +9099,7 @@
           <a:p>
             <a:pPr lvl="0"/>
             <a:r>
-              <a:rPr lang="en-US"/>
+              <a:rPr lang="en-GB"/>
               <a:t>Click to edit Master text styles</a:t>
             </a:r>
           </a:p>
@@ -9062,37 +9155,38 @@
           <a:p>
             <a:pPr lvl="0"/>
             <a:r>
-              <a:rPr lang="en-US"/>
+              <a:rPr lang="en-GB"/>
               <a:t>Click to edit Master text styles</a:t>
             </a:r>
           </a:p>
           <a:p>
             <a:pPr lvl="1"/>
             <a:r>
-              <a:rPr lang="en-US"/>
+              <a:rPr lang="en-GB"/>
               <a:t>Second level</a:t>
             </a:r>
           </a:p>
           <a:p>
             <a:pPr lvl="2"/>
             <a:r>
-              <a:rPr lang="en-US"/>
+              <a:rPr lang="en-GB"/>
               <a:t>Third level</a:t>
             </a:r>
           </a:p>
           <a:p>
             <a:pPr lvl="3"/>
             <a:r>
-              <a:rPr lang="en-US"/>
+              <a:rPr lang="en-GB"/>
               <a:t>Fourth level</a:t>
             </a:r>
           </a:p>
           <a:p>
             <a:pPr lvl="4"/>
             <a:r>
-              <a:rPr lang="en-US"/>
+              <a:rPr lang="en-GB"/>
               <a:t>Fifth level</a:t>
             </a:r>
+            <a:endParaRPr lang="en-US"/>
           </a:p>
         </p:txBody>
       </p:sp>
@@ -9155,7 +9249,7 @@
           <a:p>
             <a:pPr lvl="0"/>
             <a:r>
-              <a:rPr lang="en-US"/>
+              <a:rPr lang="en-GB"/>
               <a:t>Click to edit Master text styles</a:t>
             </a:r>
           </a:p>
@@ -9211,37 +9305,38 @@
           <a:p>
             <a:pPr lvl="0"/>
             <a:r>
-              <a:rPr lang="en-US"/>
+              <a:rPr lang="en-GB"/>
               <a:t>Click to edit Master text styles</a:t>
             </a:r>
           </a:p>
           <a:p>
             <a:pPr lvl="1"/>
             <a:r>
-              <a:rPr lang="en-US"/>
+              <a:rPr lang="en-GB"/>
               <a:t>Second level</a:t>
             </a:r>
           </a:p>
           <a:p>
             <a:pPr lvl="2"/>
             <a:r>
-              <a:rPr lang="en-US"/>
+              <a:rPr lang="en-GB"/>
               <a:t>Third level</a:t>
             </a:r>
           </a:p>
           <a:p>
             <a:pPr lvl="3"/>
             <a:r>
-              <a:rPr lang="en-US"/>
+              <a:rPr lang="en-GB"/>
               <a:t>Fourth level</a:t>
             </a:r>
           </a:p>
           <a:p>
             <a:pPr lvl="4"/>
             <a:r>
-              <a:rPr lang="en-US"/>
+              <a:rPr lang="en-GB"/>
               <a:t>Fifth level</a:t>
             </a:r>
+            <a:endParaRPr lang="en-US"/>
           </a:p>
         </p:txBody>
       </p:sp>
@@ -9262,7 +9357,7 @@
           <a:p>
             <a:fld id="{C764DE79-268F-4C1A-8933-263129D2AF90}" type="datetimeFigureOut">
               <a:rPr lang="en-US" smtClean="0"/>
-              <a:t>9/16/2025</a:t>
+              <a:t>9/19/25</a:t>
             </a:fld>
             <a:endParaRPr lang="en-US" dirty="0"/>
           </a:p>
@@ -9345,10 +9440,51 @@
           </a:fontRef>
         </p:style>
       </p:cxnSp>
+      <p:cxnSp>
+        <p:nvCxnSpPr>
+          <p:cNvPr id="11" name="Straight Connector 10">
+            <a:extLst>
+              <a:ext uri="{FF2B5EF4-FFF2-40B4-BE49-F238E27FC236}">
+                <a16:creationId xmlns:a16="http://schemas.microsoft.com/office/drawing/2014/main" id="{F3436290-11E2-F20B-966B-F18296CC48D7}"/>
+              </a:ext>
+            </a:extLst>
+          </p:cNvPr>
+          <p:cNvCxnSpPr/>
+          <p:nvPr/>
+        </p:nvCxnSpPr>
+        <p:spPr>
+          <a:xfrm>
+            <a:off x="609600" y="1447800"/>
+            <a:ext cx="11074400" cy="0"/>
+          </a:xfrm>
+          <a:prstGeom prst="line">
+            <a:avLst/>
+          </a:prstGeom>
+          <a:ln w="12700">
+            <a:solidFill>
+              <a:schemeClr val="tx1"/>
+            </a:solidFill>
+          </a:ln>
+        </p:spPr>
+        <p:style>
+          <a:lnRef idx="1">
+            <a:schemeClr val="accent1"/>
+          </a:lnRef>
+          <a:fillRef idx="0">
+            <a:schemeClr val="accent1"/>
+          </a:fillRef>
+          <a:effectRef idx="0">
+            <a:schemeClr val="accent1"/>
+          </a:effectRef>
+          <a:fontRef idx="minor">
+            <a:schemeClr val="tx1"/>
+          </a:fontRef>
+        </p:style>
+      </p:cxnSp>
     </p:spTree>
     <p:extLst>
       <p:ext uri="{BB962C8B-B14F-4D97-AF65-F5344CB8AC3E}">
-        <p14:creationId xmlns:p14="http://schemas.microsoft.com/office/powerpoint/2010/main" val="2457998779"/>
+        <p14:creationId xmlns:p14="http://schemas.microsoft.com/office/powerpoint/2010/main" val="1419101854"/>
       </p:ext>
     </p:extLst>
   </p:cSld>
@@ -9403,7 +9539,7 @@
           </a:lstStyle>
           <a:p>
             <a:r>
-              <a:rPr lang="en-US"/>
+              <a:rPr lang="en-GB"/>
               <a:t>Click to edit Master title style</a:t>
             </a:r>
             <a:endParaRPr lang="en-US" dirty="0"/>
@@ -9427,7 +9563,7 @@
           <a:p>
             <a:fld id="{C764DE79-268F-4C1A-8933-263129D2AF90}" type="datetimeFigureOut">
               <a:rPr lang="en-US" smtClean="0"/>
-              <a:t>9/16/2025</a:t>
+              <a:t>9/19/25</a:t>
             </a:fld>
             <a:endParaRPr lang="en-US" dirty="0"/>
           </a:p>
@@ -9551,10 +9687,51 @@
           </a:fontRef>
         </p:style>
       </p:cxnSp>
+      <p:cxnSp>
+        <p:nvCxnSpPr>
+          <p:cNvPr id="8" name="Straight Connector 7">
+            <a:extLst>
+              <a:ext uri="{FF2B5EF4-FFF2-40B4-BE49-F238E27FC236}">
+                <a16:creationId xmlns:a16="http://schemas.microsoft.com/office/drawing/2014/main" id="{CCF61A43-37C0-D158-13BE-1753663F3BEC}"/>
+              </a:ext>
+            </a:extLst>
+          </p:cNvPr>
+          <p:cNvCxnSpPr/>
+          <p:nvPr/>
+        </p:nvCxnSpPr>
+        <p:spPr>
+          <a:xfrm>
+            <a:off x="609600" y="1447800"/>
+            <a:ext cx="11074400" cy="0"/>
+          </a:xfrm>
+          <a:prstGeom prst="line">
+            <a:avLst/>
+          </a:prstGeom>
+          <a:ln w="12700">
+            <a:solidFill>
+              <a:schemeClr val="tx1"/>
+            </a:solidFill>
+          </a:ln>
+        </p:spPr>
+        <p:style>
+          <a:lnRef idx="1">
+            <a:schemeClr val="accent1"/>
+          </a:lnRef>
+          <a:fillRef idx="0">
+            <a:schemeClr val="accent1"/>
+          </a:fillRef>
+          <a:effectRef idx="0">
+            <a:schemeClr val="accent1"/>
+          </a:effectRef>
+          <a:fontRef idx="minor">
+            <a:schemeClr val="tx1"/>
+          </a:fontRef>
+        </p:style>
+      </p:cxnSp>
     </p:spTree>
     <p:extLst>
       <p:ext uri="{BB962C8B-B14F-4D97-AF65-F5344CB8AC3E}">
-        <p14:creationId xmlns:p14="http://schemas.microsoft.com/office/powerpoint/2010/main" val="509315919"/>
+        <p14:creationId xmlns:p14="http://schemas.microsoft.com/office/powerpoint/2010/main" val="26067797"/>
       </p:ext>
     </p:extLst>
   </p:cSld>
@@ -9598,7 +9775,7 @@
           <a:p>
             <a:fld id="{C764DE79-268F-4C1A-8933-263129D2AF90}" type="datetimeFigureOut">
               <a:rPr lang="en-US" smtClean="0"/>
-              <a:t>9/16/2025</a:t>
+              <a:t>9/19/25</a:t>
             </a:fld>
             <a:endParaRPr lang="en-US" dirty="0"/>
           </a:p>
@@ -9649,7 +9826,7 @@
     </p:spTree>
     <p:extLst>
       <p:ext uri="{BB962C8B-B14F-4D97-AF65-F5344CB8AC3E}">
-        <p14:creationId xmlns:p14="http://schemas.microsoft.com/office/powerpoint/2010/main" val="4017000230"/>
+        <p14:creationId xmlns:p14="http://schemas.microsoft.com/office/powerpoint/2010/main" val="2296114335"/>
       </p:ext>
     </p:extLst>
   </p:cSld>
@@ -9701,9 +9878,10 @@
           </a:lstStyle>
           <a:p>
             <a:r>
-              <a:rPr lang="en-US"/>
+              <a:rPr lang="en-GB"/>
               <a:t>Click to edit Master title style</a:t>
             </a:r>
+            <a:endParaRPr lang="en-US"/>
           </a:p>
         </p:txBody>
       </p:sp>
@@ -9757,37 +9935,38 @@
           <a:p>
             <a:pPr lvl="0"/>
             <a:r>
-              <a:rPr lang="en-US"/>
+              <a:rPr lang="en-GB"/>
               <a:t>Click to edit Master text styles</a:t>
             </a:r>
           </a:p>
           <a:p>
             <a:pPr lvl="1"/>
             <a:r>
-              <a:rPr lang="en-US"/>
+              <a:rPr lang="en-GB"/>
               <a:t>Second level</a:t>
             </a:r>
           </a:p>
           <a:p>
             <a:pPr lvl="2"/>
             <a:r>
-              <a:rPr lang="en-US"/>
+              <a:rPr lang="en-GB"/>
               <a:t>Third level</a:t>
             </a:r>
           </a:p>
           <a:p>
             <a:pPr lvl="3"/>
             <a:r>
-              <a:rPr lang="en-US"/>
+              <a:rPr lang="en-GB"/>
               <a:t>Fourth level</a:t>
             </a:r>
           </a:p>
           <a:p>
             <a:pPr lvl="4"/>
             <a:r>
-              <a:rPr lang="en-US"/>
+              <a:rPr lang="en-GB"/>
               <a:t>Fifth level</a:t>
             </a:r>
+            <a:endParaRPr lang="en-US"/>
           </a:p>
         </p:txBody>
       </p:sp>
@@ -9850,7 +10029,7 @@
           <a:p>
             <a:pPr lvl="0"/>
             <a:r>
-              <a:rPr lang="en-US"/>
+              <a:rPr lang="en-GB"/>
               <a:t>Click to edit Master text styles</a:t>
             </a:r>
           </a:p>
@@ -9873,7 +10052,7 @@
           <a:p>
             <a:fld id="{C764DE79-268F-4C1A-8933-263129D2AF90}" type="datetimeFigureOut">
               <a:rPr lang="en-US" smtClean="0"/>
-              <a:t>9/16/2025</a:t>
+              <a:t>9/19/25</a:t>
             </a:fld>
             <a:endParaRPr lang="en-US" dirty="0"/>
           </a:p>
@@ -9924,7 +10103,7 @@
     </p:spTree>
     <p:extLst>
       <p:ext uri="{BB962C8B-B14F-4D97-AF65-F5344CB8AC3E}">
-        <p14:creationId xmlns:p14="http://schemas.microsoft.com/office/powerpoint/2010/main" val="1553569111"/>
+        <p14:creationId xmlns:p14="http://schemas.microsoft.com/office/powerpoint/2010/main" val="413040028"/>
       </p:ext>
     </p:extLst>
   </p:cSld>
@@ -9977,9 +10156,10 @@
           </a:lstStyle>
           <a:p>
             <a:r>
-              <a:rPr lang="en-US"/>
+              <a:rPr lang="en-GB"/>
               <a:t>Click to edit Master title style</a:t>
             </a:r>
+            <a:endParaRPr lang="en-US"/>
           </a:p>
         </p:txBody>
       </p:sp>
@@ -10041,9 +10221,10 @@
           </a:lstStyle>
           <a:p>
             <a:r>
-              <a:rPr lang="en-US"/>
+              <a:rPr lang="en-GB"/>
               <a:t>Click icon to add picture</a:t>
             </a:r>
+            <a:endParaRPr lang="en-US"/>
           </a:p>
         </p:txBody>
       </p:sp>
@@ -10106,7 +10287,7 @@
           <a:p>
             <a:pPr lvl="0"/>
             <a:r>
-              <a:rPr lang="en-US"/>
+              <a:rPr lang="en-GB"/>
               <a:t>Click to edit Master text styles</a:t>
             </a:r>
           </a:p>
@@ -10129,7 +10310,7 @@
           <a:p>
             <a:fld id="{C764DE79-268F-4C1A-8933-263129D2AF90}" type="datetimeFigureOut">
               <a:rPr lang="en-US" smtClean="0"/>
-              <a:t>9/16/2025</a:t>
+              <a:t>9/19/25</a:t>
             </a:fld>
             <a:endParaRPr lang="en-US" dirty="0"/>
           </a:p>
@@ -10180,7 +10361,7 @@
     </p:spTree>
     <p:extLst>
       <p:ext uri="{BB962C8B-B14F-4D97-AF65-F5344CB8AC3E}">
-        <p14:creationId xmlns:p14="http://schemas.microsoft.com/office/powerpoint/2010/main" val="1805252568"/>
+        <p14:creationId xmlns:p14="http://schemas.microsoft.com/office/powerpoint/2010/main" val="1056425582"/>
       </p:ext>
     </p:extLst>
   </p:cSld>
@@ -10195,9 +10376,14 @@
 <p:sldMaster xmlns:a="http://schemas.openxmlformats.org/drawingml/2006/main" xmlns:r="http://schemas.openxmlformats.org/officeDocument/2006/relationships" xmlns:p="http://schemas.openxmlformats.org/presentationml/2006/main">
   <p:cSld>
     <p:bg>
-      <p:bgRef idx="1001">
-        <a:schemeClr val="bg1"/>
-      </p:bgRef>
+      <p:bgPr>
+        <a:solidFill>
+          <a:schemeClr val="bg1">
+            <a:lumMod val="85000"/>
+          </a:schemeClr>
+        </a:solidFill>
+        <a:effectLst/>
+      </p:bgPr>
     </p:bg>
     <p:spTree>
       <p:nvGrpSpPr>
@@ -10239,9 +10425,10 @@
           <a:lstStyle/>
           <a:p>
             <a:r>
-              <a:rPr lang="en-US"/>
+              <a:rPr lang="en-GB"/>
               <a:t>Click to edit Master title style</a:t>
             </a:r>
+            <a:endParaRPr lang="en-US"/>
           </a:p>
         </p:txBody>
       </p:sp>
@@ -10272,37 +10459,38 @@
           <a:p>
             <a:pPr lvl="0"/>
             <a:r>
-              <a:rPr lang="en-US"/>
+              <a:rPr lang="en-GB"/>
               <a:t>Click to edit Master text styles</a:t>
             </a:r>
           </a:p>
           <a:p>
             <a:pPr lvl="1"/>
             <a:r>
-              <a:rPr lang="en-US"/>
+              <a:rPr lang="en-GB"/>
               <a:t>Second level</a:t>
             </a:r>
           </a:p>
           <a:p>
             <a:pPr lvl="2"/>
             <a:r>
-              <a:rPr lang="en-US"/>
+              <a:rPr lang="en-GB"/>
               <a:t>Third level</a:t>
             </a:r>
           </a:p>
           <a:p>
             <a:pPr lvl="3"/>
             <a:r>
-              <a:rPr lang="en-US"/>
+              <a:rPr lang="en-GB"/>
               <a:t>Fourth level</a:t>
             </a:r>
           </a:p>
           <a:p>
             <a:pPr lvl="4"/>
             <a:r>
-              <a:rPr lang="en-US"/>
+              <a:rPr lang="en-GB"/>
               <a:t>Fifth level</a:t>
             </a:r>
+            <a:endParaRPr lang="en-US"/>
           </a:p>
         </p:txBody>
       </p:sp>
@@ -10341,7 +10529,7 @@
           <a:p>
             <a:fld id="{C764DE79-268F-4C1A-8933-263129D2AF90}" type="datetimeFigureOut">
               <a:rPr lang="en-US" smtClean="0"/>
-              <a:t>9/16/2025</a:t>
+              <a:t>9/19/25</a:t>
             </a:fld>
             <a:endParaRPr lang="en-US" dirty="0"/>
           </a:p>
@@ -10428,27 +10616,27 @@
     </p:spTree>
     <p:extLst>
       <p:ext uri="{BB962C8B-B14F-4D97-AF65-F5344CB8AC3E}">
-        <p14:creationId xmlns:p14="http://schemas.microsoft.com/office/powerpoint/2010/main" val="2677633553"/>
+        <p14:creationId xmlns:p14="http://schemas.microsoft.com/office/powerpoint/2010/main" val="1000603538"/>
       </p:ext>
     </p:extLst>
   </p:cSld>
   <p:clrMap bg1="lt1" tx1="dk1" bg2="lt2" tx2="dk2" accent1="accent1" accent2="accent2" accent3="accent3" accent4="accent4" accent5="accent5" accent6="accent6" hlink="hlink" folHlink="folHlink"/>
   <p:sldLayoutIdLst>
-    <p:sldLayoutId id="2147483941" r:id="rId1"/>
-    <p:sldLayoutId id="2147483942" r:id="rId2"/>
-    <p:sldLayoutId id="2147483943" r:id="rId3"/>
-    <p:sldLayoutId id="2147483944" r:id="rId4"/>
-    <p:sldLayoutId id="2147483945" r:id="rId5"/>
-    <p:sldLayoutId id="2147483946" r:id="rId6"/>
-    <p:sldLayoutId id="2147483947" r:id="rId7"/>
-    <p:sldLayoutId id="2147483948" r:id="rId8"/>
-    <p:sldLayoutId id="2147483949" r:id="rId9"/>
-    <p:sldLayoutId id="2147483950" r:id="rId10"/>
-    <p:sldLayoutId id="2147483951" r:id="rId11"/>
-    <p:sldLayoutId id="2147483952" r:id="rId12"/>
-    <p:sldLayoutId id="2147483953" r:id="rId13"/>
-    <p:sldLayoutId id="2147483954" r:id="rId14"/>
-    <p:sldLayoutId id="2147483955" r:id="rId15"/>
+    <p:sldLayoutId id="2147483957" r:id="rId1"/>
+    <p:sldLayoutId id="2147483958" r:id="rId2"/>
+    <p:sldLayoutId id="2147483959" r:id="rId3"/>
+    <p:sldLayoutId id="2147483960" r:id="rId4"/>
+    <p:sldLayoutId id="2147483961" r:id="rId5"/>
+    <p:sldLayoutId id="2147483962" r:id="rId6"/>
+    <p:sldLayoutId id="2147483963" r:id="rId7"/>
+    <p:sldLayoutId id="2147483964" r:id="rId8"/>
+    <p:sldLayoutId id="2147483965" r:id="rId9"/>
+    <p:sldLayoutId id="2147483966" r:id="rId10"/>
+    <p:sldLayoutId id="2147483967" r:id="rId11"/>
+    <p:sldLayoutId id="2147483968" r:id="rId12"/>
+    <p:sldLayoutId id="2147483969" r:id="rId13"/>
+    <p:sldLayoutId id="2147483970" r:id="rId14"/>
+    <p:sldLayoutId id="2147483971" r:id="rId15"/>
   </p:sldLayoutIdLst>
   <p:hf sldNum="0" hdr="0" dt="0"/>
   <p:txStyles>
@@ -10811,14 +10999,14 @@
           </a:ln>
           <a:extLst>
             <a:ext uri="{909E8E84-426E-40dd-AFC4-6F175D3DCCD1}">
-              <a14:hiddenFill xmlns="" xmlns:a14="http://schemas.microsoft.com/office/drawing/2010/main">
+              <a14:hiddenFill xmlns:a14="http://schemas.microsoft.com/office/drawing/2010/main" xmlns="">
                 <a:solidFill>
                   <a:srgbClr val="FFFFFF"/>
                 </a:solidFill>
               </a14:hiddenFill>
             </a:ext>
             <a:ext uri="{91240B29-F687-4f45-9708-019B960494DF}">
-              <a14:hiddenLine xmlns="" xmlns:a14="http://schemas.microsoft.com/office/drawing/2010/main" w="9525">
+              <a14:hiddenLine xmlns:a14="http://schemas.microsoft.com/office/drawing/2010/main" xmlns="" w="9525">
                 <a:solidFill>
                   <a:srgbClr val="000000"/>
                 </a:solidFill>
@@ -11177,33 +11365,34 @@
             </a:lvl9pPr>
           </a:lstStyle>
           <a:p>
-            <a:pPr algn="r">
+            <a:pPr marL="0" indent="0">
               <a:lnSpc>
                 <a:spcPct val="110000"/>
               </a:lnSpc>
               <a:spcBef>
                 <a:spcPts val="0"/>
               </a:spcBef>
+              <a:buNone/>
             </a:pPr>
             <a:r>
-              <a:rPr lang="en-IE" sz="2400"/>
+              <a:rPr lang="en-IE" sz="2400" dirty="0"/>
               <a:t>Produced </a:t>
             </a:r>
           </a:p>
           <a:p>
-            <a:pPr algn="r">
+            <a:pPr marL="0" indent="0">
               <a:lnSpc>
                 <a:spcPct val="110000"/>
               </a:lnSpc>
               <a:spcBef>
                 <a:spcPts val="0"/>
               </a:spcBef>
+              <a:buNone/>
             </a:pPr>
             <a:r>
-              <a:rPr lang="en-IE" sz="2400"/>
+              <a:rPr lang="en-IE" sz="2400" dirty="0"/>
               <a:t>by:</a:t>
             </a:r>
-            <a:endParaRPr lang="en-IE" sz="2400" dirty="0"/>
           </a:p>
         </p:txBody>
       </p:sp>
@@ -12404,14 +12593,14 @@
           <a:noFill/>
           <a:extLst>
             <a:ext uri="{909E8E84-426E-40dd-AFC4-6F175D3DCCD1}">
-              <a14:hiddenFill xmlns="" xmlns:a14="http://schemas.microsoft.com/office/drawing/2010/main">
+              <a14:hiddenFill xmlns:a14="http://schemas.microsoft.com/office/drawing/2010/main" xmlns="">
                 <a:solidFill>
                   <a:srgbClr val="FFFFFF"/>
                 </a:solidFill>
               </a14:hiddenFill>
             </a:ext>
             <a:ext uri="{91240B29-F687-4f45-9708-019B960494DF}">
-              <a14:hiddenLine xmlns="" xmlns:a14="http://schemas.microsoft.com/office/drawing/2010/main" w="9525">
+              <a14:hiddenLine xmlns:a14="http://schemas.microsoft.com/office/drawing/2010/main" xmlns="" w="9525">
                 <a:solidFill>
                   <a:srgbClr val="000000"/>
                 </a:solidFill>
@@ -12628,7 +12817,7 @@
           </a:ln>
           <a:extLst>
             <a:ext uri="{909E8E84-426E-40dd-AFC4-6F175D3DCCD1}">
-              <a14:hiddenFill xmlns="" xmlns:a14="http://schemas.microsoft.com/office/drawing/2010/main">
+              <a14:hiddenFill xmlns:a14="http://schemas.microsoft.com/office/drawing/2010/main" xmlns="">
                 <a:solidFill>
                   <a:srgbClr val="FFFFFF"/>
                 </a:solidFill>
@@ -13005,14 +13194,14 @@
           </a:ln>
           <a:extLst>
             <a:ext uri="{909E8E84-426E-40dd-AFC4-6F175D3DCCD1}">
-              <a14:hiddenFill xmlns="" xmlns:a14="http://schemas.microsoft.com/office/drawing/2010/main">
+              <a14:hiddenFill xmlns:a14="http://schemas.microsoft.com/office/drawing/2010/main" xmlns="">
                 <a:solidFill>
                   <a:srgbClr val="FFFFFF"/>
                 </a:solidFill>
               </a14:hiddenFill>
             </a:ext>
             <a:ext uri="{91240B29-F687-4f45-9708-019B960494DF}">
-              <a14:hiddenLine xmlns="" xmlns:a14="http://schemas.microsoft.com/office/drawing/2010/main" w="9525">
+              <a14:hiddenLine xmlns:a14="http://schemas.microsoft.com/office/drawing/2010/main" xmlns="" w="9525">
                 <a:solidFill>
                   <a:srgbClr val="000000"/>
                 </a:solidFill>
@@ -13229,14 +13418,14 @@
           </a:ln>
           <a:extLst>
             <a:ext uri="{909E8E84-426E-40dd-AFC4-6F175D3DCCD1}">
-              <a14:hiddenFill xmlns="" xmlns:a14="http://schemas.microsoft.com/office/drawing/2010/main">
+              <a14:hiddenFill xmlns:a14="http://schemas.microsoft.com/office/drawing/2010/main" xmlns="">
                 <a:solidFill>
                   <a:srgbClr val="FFFFFF"/>
                 </a:solidFill>
               </a14:hiddenFill>
             </a:ext>
             <a:ext uri="{91240B29-F687-4f45-9708-019B960494DF}">
-              <a14:hiddenLine xmlns="" xmlns:a14="http://schemas.microsoft.com/office/drawing/2010/main" w="9525">
+              <a14:hiddenLine xmlns:a14="http://schemas.microsoft.com/office/drawing/2010/main" xmlns="" w="9525">
                 <a:solidFill>
                   <a:srgbClr val="000000"/>
                 </a:solidFill>
@@ -13452,14 +13641,14 @@
           </a:ln>
           <a:extLst>
             <a:ext uri="{909E8E84-426E-40dd-AFC4-6F175D3DCCD1}">
-              <a14:hiddenFill xmlns="" xmlns:a14="http://schemas.microsoft.com/office/drawing/2010/main">
+              <a14:hiddenFill xmlns:a14="http://schemas.microsoft.com/office/drawing/2010/main" xmlns="">
                 <a:solidFill>
                   <a:srgbClr val="FFFFFF"/>
                 </a:solidFill>
               </a14:hiddenFill>
             </a:ext>
             <a:ext uri="{91240B29-F687-4f45-9708-019B960494DF}">
-              <a14:hiddenLine xmlns="" xmlns:a14="http://schemas.microsoft.com/office/drawing/2010/main" w="9525">
+              <a14:hiddenLine xmlns:a14="http://schemas.microsoft.com/office/drawing/2010/main" xmlns="" w="9525">
                 <a:solidFill>
                   <a:srgbClr val="000000"/>
                 </a:solidFill>
@@ -13675,14 +13864,14 @@
           </a:ln>
           <a:extLst>
             <a:ext uri="{909E8E84-426E-40dd-AFC4-6F175D3DCCD1}">
-              <a14:hiddenFill xmlns="" xmlns:a14="http://schemas.microsoft.com/office/drawing/2010/main">
+              <a14:hiddenFill xmlns:a14="http://schemas.microsoft.com/office/drawing/2010/main" xmlns="">
                 <a:solidFill>
                   <a:srgbClr val="FFFFFF"/>
                 </a:solidFill>
               </a14:hiddenFill>
             </a:ext>
             <a:ext uri="{91240B29-F687-4f45-9708-019B960494DF}">
-              <a14:hiddenLine xmlns="" xmlns:a14="http://schemas.microsoft.com/office/drawing/2010/main" w="9525">
+              <a14:hiddenLine xmlns:a14="http://schemas.microsoft.com/office/drawing/2010/main" xmlns="" w="9525">
                 <a:solidFill>
                   <a:srgbClr val="000000"/>
                 </a:solidFill>
@@ -13903,7 +14092,7 @@
           </a:ln>
           <a:extLst>
             <a:ext uri="{909E8E84-426E-40dd-AFC4-6F175D3DCCD1}">
-              <a14:hiddenFill xmlns="" xmlns:a14="http://schemas.microsoft.com/office/drawing/2010/main">
+              <a14:hiddenFill xmlns:a14="http://schemas.microsoft.com/office/drawing/2010/main" xmlns="">
                 <a:noFill/>
               </a14:hiddenFill>
             </a:ext>
@@ -13944,7 +14133,7 @@
           </a:ln>
           <a:extLst>
             <a:ext uri="{909E8E84-426E-40dd-AFC4-6F175D3DCCD1}">
-              <a14:hiddenFill xmlns="" xmlns:a14="http://schemas.microsoft.com/office/drawing/2010/main">
+              <a14:hiddenFill xmlns:a14="http://schemas.microsoft.com/office/drawing/2010/main" xmlns="">
                 <a:noFill/>
               </a14:hiddenFill>
             </a:ext>
@@ -13985,7 +14174,7 @@
           </a:ln>
           <a:extLst>
             <a:ext uri="{909E8E84-426E-40dd-AFC4-6F175D3DCCD1}">
-              <a14:hiddenFill xmlns="" xmlns:a14="http://schemas.microsoft.com/office/drawing/2010/main">
+              <a14:hiddenFill xmlns:a14="http://schemas.microsoft.com/office/drawing/2010/main" xmlns="">
                 <a:noFill/>
               </a14:hiddenFill>
             </a:ext>
@@ -15160,14 +15349,14 @@
           </a:ln>
           <a:extLst>
             <a:ext uri="{909E8E84-426E-40dd-AFC4-6F175D3DCCD1}">
-              <a14:hiddenFill xmlns="" xmlns:a14="http://schemas.microsoft.com/office/drawing/2010/main">
+              <a14:hiddenFill xmlns:a14="http://schemas.microsoft.com/office/drawing/2010/main" xmlns="">
                 <a:solidFill>
                   <a:srgbClr val="FFFFFF"/>
                 </a:solidFill>
               </a14:hiddenFill>
             </a:ext>
             <a:ext uri="{91240B29-F687-4f45-9708-019B960494DF}">
-              <a14:hiddenLine xmlns="" xmlns:a14="http://schemas.microsoft.com/office/drawing/2010/main" w="9525">
+              <a14:hiddenLine xmlns:a14="http://schemas.microsoft.com/office/drawing/2010/main" xmlns="" w="9525">
                 <a:solidFill>
                   <a:srgbClr val="000000"/>
                 </a:solidFill>
@@ -16090,14 +16279,14 @@
           </a:ln>
           <a:extLst>
             <a:ext uri="{909E8E84-426E-40dd-AFC4-6F175D3DCCD1}">
-              <a14:hiddenFill xmlns="" xmlns:a14="http://schemas.microsoft.com/office/drawing/2010/main">
+              <a14:hiddenFill xmlns:a14="http://schemas.microsoft.com/office/drawing/2010/main" xmlns="">
                 <a:solidFill>
                   <a:srgbClr val="FFFFFF"/>
                 </a:solidFill>
               </a14:hiddenFill>
             </a:ext>
             <a:ext uri="{91240B29-F687-4f45-9708-019B960494DF}">
-              <a14:hiddenLine xmlns="" xmlns:a14="http://schemas.microsoft.com/office/drawing/2010/main" w="9525">
+              <a14:hiddenLine xmlns:a14="http://schemas.microsoft.com/office/drawing/2010/main" xmlns="" w="9525">
                 <a:solidFill>
                   <a:srgbClr val="000000"/>
                 </a:solidFill>
@@ -17361,7 +17550,7 @@
               <a:defRPr/>
             </a:pPr>
             <a:r>
-              <a:rPr lang="en-GB">
+              <a:rPr lang="en-GB" dirty="0">
                 <a:ea typeface="+mn-ea"/>
                 <a:cs typeface="+mn-cs"/>
               </a:rPr>
@@ -17373,7 +17562,7 @@
               <a:defRPr/>
             </a:pPr>
             <a:r>
-              <a:rPr lang="en-GB">
+              <a:rPr lang="en-GB" dirty="0">
                 <a:ea typeface="+mn-ea"/>
                 <a:cs typeface="+mn-cs"/>
               </a:rPr>
@@ -17385,7 +17574,7 @@
               <a:defRPr/>
             </a:pPr>
             <a:r>
-              <a:rPr lang="en-GB">
+              <a:rPr lang="en-GB" dirty="0">
                 <a:ea typeface="+mn-ea"/>
                 <a:cs typeface="+mn-cs"/>
               </a:rPr>
@@ -17397,7 +17586,7 @@
               <a:defRPr/>
             </a:pPr>
             <a:r>
-              <a:rPr lang="en-GB">
+              <a:rPr lang="en-GB" dirty="0">
                 <a:ea typeface="+mn-ea"/>
                 <a:cs typeface="+mn-cs"/>
               </a:rPr>
@@ -17409,7 +17598,7 @@
               <a:defRPr/>
             </a:pPr>
             <a:r>
-              <a:rPr lang="en-GB">
+              <a:rPr lang="en-GB" dirty="0">
                 <a:ea typeface="+mn-ea"/>
                 <a:cs typeface="+mn-cs"/>
               </a:rPr>
@@ -17422,7 +17611,7 @@
               <a:buNone/>
               <a:defRPr/>
             </a:pPr>
-            <a:endParaRPr lang="en-GB">
+            <a:endParaRPr lang="en-GB" dirty="0">
               <a:ea typeface="+mn-ea"/>
               <a:cs typeface="+mn-cs"/>
             </a:endParaRPr>
@@ -17434,6 +17623,551 @@
   <p:clrMapOvr>
     <a:masterClrMapping/>
   </p:clrMapOvr>
+  <p:timing>
+    <p:tnLst>
+      <p:par>
+        <p:cTn id="1" dur="indefinite" restart="never" nodeType="tmRoot">
+          <p:childTnLst>
+            <p:seq concurrent="1" nextAc="seek">
+              <p:cTn id="2" dur="indefinite" nodeType="mainSeq">
+                <p:childTnLst>
+                  <p:par>
+                    <p:cTn id="3" fill="hold">
+                      <p:stCondLst>
+                        <p:cond delay="indefinite"/>
+                      </p:stCondLst>
+                      <p:childTnLst>
+                        <p:par>
+                          <p:cTn id="4" fill="hold">
+                            <p:stCondLst>
+                              <p:cond delay="0"/>
+                            </p:stCondLst>
+                            <p:childTnLst>
+                              <p:par>
+                                <p:cTn id="5" presetID="2" presetClass="entr" presetSubtype="4" fill="hold" nodeType="clickEffect">
+                                  <p:stCondLst>
+                                    <p:cond delay="0"/>
+                                  </p:stCondLst>
+                                  <p:childTnLst>
+                                    <p:set>
+                                      <p:cBhvr>
+                                        <p:cTn id="6" dur="1" fill="hold">
+                                          <p:stCondLst>
+                                            <p:cond delay="0"/>
+                                          </p:stCondLst>
+                                        </p:cTn>
+                                        <p:tgtEl>
+                                          <p:spTgt spid="5123">
+                                            <p:txEl>
+                                              <p:pRg st="0" end="0"/>
+                                            </p:txEl>
+                                          </p:spTgt>
+                                        </p:tgtEl>
+                                        <p:attrNameLst>
+                                          <p:attrName>style.visibility</p:attrName>
+                                        </p:attrNameLst>
+                                      </p:cBhvr>
+                                      <p:to>
+                                        <p:strVal val="visible"/>
+                                      </p:to>
+                                    </p:set>
+                                    <p:anim calcmode="lin" valueType="num">
+                                      <p:cBhvr additive="base">
+                                        <p:cTn id="7" dur="500" fill="hold"/>
+                                        <p:tgtEl>
+                                          <p:spTgt spid="5123">
+                                            <p:txEl>
+                                              <p:pRg st="0" end="0"/>
+                                            </p:txEl>
+                                          </p:spTgt>
+                                        </p:tgtEl>
+                                        <p:attrNameLst>
+                                          <p:attrName>ppt_x</p:attrName>
+                                        </p:attrNameLst>
+                                      </p:cBhvr>
+                                      <p:tavLst>
+                                        <p:tav tm="0">
+                                          <p:val>
+                                            <p:strVal val="#ppt_x"/>
+                                          </p:val>
+                                        </p:tav>
+                                        <p:tav tm="100000">
+                                          <p:val>
+                                            <p:strVal val="#ppt_x"/>
+                                          </p:val>
+                                        </p:tav>
+                                      </p:tavLst>
+                                    </p:anim>
+                                    <p:anim calcmode="lin" valueType="num">
+                                      <p:cBhvr additive="base">
+                                        <p:cTn id="8" dur="500" fill="hold"/>
+                                        <p:tgtEl>
+                                          <p:spTgt spid="5123">
+                                            <p:txEl>
+                                              <p:pRg st="0" end="0"/>
+                                            </p:txEl>
+                                          </p:spTgt>
+                                        </p:tgtEl>
+                                        <p:attrNameLst>
+                                          <p:attrName>ppt_y</p:attrName>
+                                        </p:attrNameLst>
+                                      </p:cBhvr>
+                                      <p:tavLst>
+                                        <p:tav tm="0">
+                                          <p:val>
+                                            <p:strVal val="1+#ppt_h/2"/>
+                                          </p:val>
+                                        </p:tav>
+                                        <p:tav tm="100000">
+                                          <p:val>
+                                            <p:strVal val="#ppt_y"/>
+                                          </p:val>
+                                        </p:tav>
+                                      </p:tavLst>
+                                    </p:anim>
+                                  </p:childTnLst>
+                                </p:cTn>
+                              </p:par>
+                            </p:childTnLst>
+                          </p:cTn>
+                        </p:par>
+                      </p:childTnLst>
+                    </p:cTn>
+                  </p:par>
+                  <p:par>
+                    <p:cTn id="9" fill="hold">
+                      <p:stCondLst>
+                        <p:cond delay="indefinite"/>
+                      </p:stCondLst>
+                      <p:childTnLst>
+                        <p:par>
+                          <p:cTn id="10" fill="hold">
+                            <p:stCondLst>
+                              <p:cond delay="0"/>
+                            </p:stCondLst>
+                            <p:childTnLst>
+                              <p:par>
+                                <p:cTn id="11" presetID="2" presetClass="entr" presetSubtype="4" fill="hold" nodeType="clickEffect">
+                                  <p:stCondLst>
+                                    <p:cond delay="0"/>
+                                  </p:stCondLst>
+                                  <p:childTnLst>
+                                    <p:set>
+                                      <p:cBhvr>
+                                        <p:cTn id="12" dur="1" fill="hold">
+                                          <p:stCondLst>
+                                            <p:cond delay="0"/>
+                                          </p:stCondLst>
+                                        </p:cTn>
+                                        <p:tgtEl>
+                                          <p:spTgt spid="5123">
+                                            <p:txEl>
+                                              <p:pRg st="1" end="1"/>
+                                            </p:txEl>
+                                          </p:spTgt>
+                                        </p:tgtEl>
+                                        <p:attrNameLst>
+                                          <p:attrName>style.visibility</p:attrName>
+                                        </p:attrNameLst>
+                                      </p:cBhvr>
+                                      <p:to>
+                                        <p:strVal val="visible"/>
+                                      </p:to>
+                                    </p:set>
+                                    <p:anim calcmode="lin" valueType="num">
+                                      <p:cBhvr additive="base">
+                                        <p:cTn id="13" dur="500" fill="hold"/>
+                                        <p:tgtEl>
+                                          <p:spTgt spid="5123">
+                                            <p:txEl>
+                                              <p:pRg st="1" end="1"/>
+                                            </p:txEl>
+                                          </p:spTgt>
+                                        </p:tgtEl>
+                                        <p:attrNameLst>
+                                          <p:attrName>ppt_x</p:attrName>
+                                        </p:attrNameLst>
+                                      </p:cBhvr>
+                                      <p:tavLst>
+                                        <p:tav tm="0">
+                                          <p:val>
+                                            <p:strVal val="#ppt_x"/>
+                                          </p:val>
+                                        </p:tav>
+                                        <p:tav tm="100000">
+                                          <p:val>
+                                            <p:strVal val="#ppt_x"/>
+                                          </p:val>
+                                        </p:tav>
+                                      </p:tavLst>
+                                    </p:anim>
+                                    <p:anim calcmode="lin" valueType="num">
+                                      <p:cBhvr additive="base">
+                                        <p:cTn id="14" dur="500" fill="hold"/>
+                                        <p:tgtEl>
+                                          <p:spTgt spid="5123">
+                                            <p:txEl>
+                                              <p:pRg st="1" end="1"/>
+                                            </p:txEl>
+                                          </p:spTgt>
+                                        </p:tgtEl>
+                                        <p:attrNameLst>
+                                          <p:attrName>ppt_y</p:attrName>
+                                        </p:attrNameLst>
+                                      </p:cBhvr>
+                                      <p:tavLst>
+                                        <p:tav tm="0">
+                                          <p:val>
+                                            <p:strVal val="1+#ppt_h/2"/>
+                                          </p:val>
+                                        </p:tav>
+                                        <p:tav tm="100000">
+                                          <p:val>
+                                            <p:strVal val="#ppt_y"/>
+                                          </p:val>
+                                        </p:tav>
+                                      </p:tavLst>
+                                    </p:anim>
+                                  </p:childTnLst>
+                                </p:cTn>
+                              </p:par>
+                            </p:childTnLst>
+                          </p:cTn>
+                        </p:par>
+                      </p:childTnLst>
+                    </p:cTn>
+                  </p:par>
+                  <p:par>
+                    <p:cTn id="15" fill="hold">
+                      <p:stCondLst>
+                        <p:cond delay="indefinite"/>
+                      </p:stCondLst>
+                      <p:childTnLst>
+                        <p:par>
+                          <p:cTn id="16" fill="hold">
+                            <p:stCondLst>
+                              <p:cond delay="0"/>
+                            </p:stCondLst>
+                            <p:childTnLst>
+                              <p:par>
+                                <p:cTn id="17" presetID="2" presetClass="entr" presetSubtype="4" fill="hold" nodeType="clickEffect">
+                                  <p:stCondLst>
+                                    <p:cond delay="0"/>
+                                  </p:stCondLst>
+                                  <p:childTnLst>
+                                    <p:set>
+                                      <p:cBhvr>
+                                        <p:cTn id="18" dur="1" fill="hold">
+                                          <p:stCondLst>
+                                            <p:cond delay="0"/>
+                                          </p:stCondLst>
+                                        </p:cTn>
+                                        <p:tgtEl>
+                                          <p:spTgt spid="5123">
+                                            <p:txEl>
+                                              <p:pRg st="2" end="2"/>
+                                            </p:txEl>
+                                          </p:spTgt>
+                                        </p:tgtEl>
+                                        <p:attrNameLst>
+                                          <p:attrName>style.visibility</p:attrName>
+                                        </p:attrNameLst>
+                                      </p:cBhvr>
+                                      <p:to>
+                                        <p:strVal val="visible"/>
+                                      </p:to>
+                                    </p:set>
+                                    <p:anim calcmode="lin" valueType="num">
+                                      <p:cBhvr additive="base">
+                                        <p:cTn id="19" dur="500" fill="hold"/>
+                                        <p:tgtEl>
+                                          <p:spTgt spid="5123">
+                                            <p:txEl>
+                                              <p:pRg st="2" end="2"/>
+                                            </p:txEl>
+                                          </p:spTgt>
+                                        </p:tgtEl>
+                                        <p:attrNameLst>
+                                          <p:attrName>ppt_x</p:attrName>
+                                        </p:attrNameLst>
+                                      </p:cBhvr>
+                                      <p:tavLst>
+                                        <p:tav tm="0">
+                                          <p:val>
+                                            <p:strVal val="#ppt_x"/>
+                                          </p:val>
+                                        </p:tav>
+                                        <p:tav tm="100000">
+                                          <p:val>
+                                            <p:strVal val="#ppt_x"/>
+                                          </p:val>
+                                        </p:tav>
+                                      </p:tavLst>
+                                    </p:anim>
+                                    <p:anim calcmode="lin" valueType="num">
+                                      <p:cBhvr additive="base">
+                                        <p:cTn id="20" dur="500" fill="hold"/>
+                                        <p:tgtEl>
+                                          <p:spTgt spid="5123">
+                                            <p:txEl>
+                                              <p:pRg st="2" end="2"/>
+                                            </p:txEl>
+                                          </p:spTgt>
+                                        </p:tgtEl>
+                                        <p:attrNameLst>
+                                          <p:attrName>ppt_y</p:attrName>
+                                        </p:attrNameLst>
+                                      </p:cBhvr>
+                                      <p:tavLst>
+                                        <p:tav tm="0">
+                                          <p:val>
+                                            <p:strVal val="1+#ppt_h/2"/>
+                                          </p:val>
+                                        </p:tav>
+                                        <p:tav tm="100000">
+                                          <p:val>
+                                            <p:strVal val="#ppt_y"/>
+                                          </p:val>
+                                        </p:tav>
+                                      </p:tavLst>
+                                    </p:anim>
+                                  </p:childTnLst>
+                                </p:cTn>
+                              </p:par>
+                            </p:childTnLst>
+                          </p:cTn>
+                        </p:par>
+                      </p:childTnLst>
+                    </p:cTn>
+                  </p:par>
+                  <p:par>
+                    <p:cTn id="21" fill="hold">
+                      <p:stCondLst>
+                        <p:cond delay="indefinite"/>
+                      </p:stCondLst>
+                      <p:childTnLst>
+                        <p:par>
+                          <p:cTn id="22" fill="hold">
+                            <p:stCondLst>
+                              <p:cond delay="0"/>
+                            </p:stCondLst>
+                            <p:childTnLst>
+                              <p:par>
+                                <p:cTn id="23" presetID="2" presetClass="entr" presetSubtype="4" fill="hold" nodeType="clickEffect">
+                                  <p:stCondLst>
+                                    <p:cond delay="0"/>
+                                  </p:stCondLst>
+                                  <p:childTnLst>
+                                    <p:set>
+                                      <p:cBhvr>
+                                        <p:cTn id="24" dur="1" fill="hold">
+                                          <p:stCondLst>
+                                            <p:cond delay="0"/>
+                                          </p:stCondLst>
+                                        </p:cTn>
+                                        <p:tgtEl>
+                                          <p:spTgt spid="5123">
+                                            <p:txEl>
+                                              <p:pRg st="3" end="3"/>
+                                            </p:txEl>
+                                          </p:spTgt>
+                                        </p:tgtEl>
+                                        <p:attrNameLst>
+                                          <p:attrName>style.visibility</p:attrName>
+                                        </p:attrNameLst>
+                                      </p:cBhvr>
+                                      <p:to>
+                                        <p:strVal val="visible"/>
+                                      </p:to>
+                                    </p:set>
+                                    <p:anim calcmode="lin" valueType="num">
+                                      <p:cBhvr additive="base">
+                                        <p:cTn id="25" dur="500" fill="hold"/>
+                                        <p:tgtEl>
+                                          <p:spTgt spid="5123">
+                                            <p:txEl>
+                                              <p:pRg st="3" end="3"/>
+                                            </p:txEl>
+                                          </p:spTgt>
+                                        </p:tgtEl>
+                                        <p:attrNameLst>
+                                          <p:attrName>ppt_x</p:attrName>
+                                        </p:attrNameLst>
+                                      </p:cBhvr>
+                                      <p:tavLst>
+                                        <p:tav tm="0">
+                                          <p:val>
+                                            <p:strVal val="#ppt_x"/>
+                                          </p:val>
+                                        </p:tav>
+                                        <p:tav tm="100000">
+                                          <p:val>
+                                            <p:strVal val="#ppt_x"/>
+                                          </p:val>
+                                        </p:tav>
+                                      </p:tavLst>
+                                    </p:anim>
+                                    <p:anim calcmode="lin" valueType="num">
+                                      <p:cBhvr additive="base">
+                                        <p:cTn id="26" dur="500" fill="hold"/>
+                                        <p:tgtEl>
+                                          <p:spTgt spid="5123">
+                                            <p:txEl>
+                                              <p:pRg st="3" end="3"/>
+                                            </p:txEl>
+                                          </p:spTgt>
+                                        </p:tgtEl>
+                                        <p:attrNameLst>
+                                          <p:attrName>ppt_y</p:attrName>
+                                        </p:attrNameLst>
+                                      </p:cBhvr>
+                                      <p:tavLst>
+                                        <p:tav tm="0">
+                                          <p:val>
+                                            <p:strVal val="1+#ppt_h/2"/>
+                                          </p:val>
+                                        </p:tav>
+                                        <p:tav tm="100000">
+                                          <p:val>
+                                            <p:strVal val="#ppt_y"/>
+                                          </p:val>
+                                        </p:tav>
+                                      </p:tavLst>
+                                    </p:anim>
+                                  </p:childTnLst>
+                                </p:cTn>
+                              </p:par>
+                            </p:childTnLst>
+                          </p:cTn>
+                        </p:par>
+                      </p:childTnLst>
+                    </p:cTn>
+                  </p:par>
+                  <p:par>
+                    <p:cTn id="27" fill="hold">
+                      <p:stCondLst>
+                        <p:cond delay="indefinite"/>
+                      </p:stCondLst>
+                      <p:childTnLst>
+                        <p:par>
+                          <p:cTn id="28" fill="hold">
+                            <p:stCondLst>
+                              <p:cond delay="0"/>
+                            </p:stCondLst>
+                            <p:childTnLst>
+                              <p:par>
+                                <p:cTn id="29" presetID="2" presetClass="entr" presetSubtype="4" fill="hold" nodeType="clickEffect">
+                                  <p:stCondLst>
+                                    <p:cond delay="0"/>
+                                  </p:stCondLst>
+                                  <p:childTnLst>
+                                    <p:set>
+                                      <p:cBhvr>
+                                        <p:cTn id="30" dur="1" fill="hold">
+                                          <p:stCondLst>
+                                            <p:cond delay="0"/>
+                                          </p:stCondLst>
+                                        </p:cTn>
+                                        <p:tgtEl>
+                                          <p:spTgt spid="5123">
+                                            <p:txEl>
+                                              <p:pRg st="4" end="4"/>
+                                            </p:txEl>
+                                          </p:spTgt>
+                                        </p:tgtEl>
+                                        <p:attrNameLst>
+                                          <p:attrName>style.visibility</p:attrName>
+                                        </p:attrNameLst>
+                                      </p:cBhvr>
+                                      <p:to>
+                                        <p:strVal val="visible"/>
+                                      </p:to>
+                                    </p:set>
+                                    <p:anim calcmode="lin" valueType="num">
+                                      <p:cBhvr additive="base">
+                                        <p:cTn id="31" dur="500" fill="hold"/>
+                                        <p:tgtEl>
+                                          <p:spTgt spid="5123">
+                                            <p:txEl>
+                                              <p:pRg st="4" end="4"/>
+                                            </p:txEl>
+                                          </p:spTgt>
+                                        </p:tgtEl>
+                                        <p:attrNameLst>
+                                          <p:attrName>ppt_x</p:attrName>
+                                        </p:attrNameLst>
+                                      </p:cBhvr>
+                                      <p:tavLst>
+                                        <p:tav tm="0">
+                                          <p:val>
+                                            <p:strVal val="#ppt_x"/>
+                                          </p:val>
+                                        </p:tav>
+                                        <p:tav tm="100000">
+                                          <p:val>
+                                            <p:strVal val="#ppt_x"/>
+                                          </p:val>
+                                        </p:tav>
+                                      </p:tavLst>
+                                    </p:anim>
+                                    <p:anim calcmode="lin" valueType="num">
+                                      <p:cBhvr additive="base">
+                                        <p:cTn id="32" dur="500" fill="hold"/>
+                                        <p:tgtEl>
+                                          <p:spTgt spid="5123">
+                                            <p:txEl>
+                                              <p:pRg st="4" end="4"/>
+                                            </p:txEl>
+                                          </p:spTgt>
+                                        </p:tgtEl>
+                                        <p:attrNameLst>
+                                          <p:attrName>ppt_y</p:attrName>
+                                        </p:attrNameLst>
+                                      </p:cBhvr>
+                                      <p:tavLst>
+                                        <p:tav tm="0">
+                                          <p:val>
+                                            <p:strVal val="1+#ppt_h/2"/>
+                                          </p:val>
+                                        </p:tav>
+                                        <p:tav tm="100000">
+                                          <p:val>
+                                            <p:strVal val="#ppt_y"/>
+                                          </p:val>
+                                        </p:tav>
+                                      </p:tavLst>
+                                    </p:anim>
+                                  </p:childTnLst>
+                                </p:cTn>
+                              </p:par>
+                            </p:childTnLst>
+                          </p:cTn>
+                        </p:par>
+                      </p:childTnLst>
+                    </p:cTn>
+                  </p:par>
+                </p:childTnLst>
+              </p:cTn>
+              <p:prevCondLst>
+                <p:cond evt="onPrev" delay="0">
+                  <p:tgtEl>
+                    <p:sldTgt/>
+                  </p:tgtEl>
+                </p:cond>
+              </p:prevCondLst>
+              <p:nextCondLst>
+                <p:cond evt="onNext" delay="0">
+                  <p:tgtEl>
+                    <p:sldTgt/>
+                  </p:tgtEl>
+                </p:cond>
+              </p:nextCondLst>
+            </p:seq>
+          </p:childTnLst>
+        </p:cTn>
+      </p:par>
+    </p:tnLst>
+  </p:timing>
 </p:sld>
 </file>
 
@@ -17643,19 +18377,19 @@
           <a:p>
             <a:pPr eaLnBrk="1" hangingPunct="1"/>
             <a:r>
-              <a:rPr lang="en-GB" altLang="en-US">
+              <a:rPr lang="en-GB" altLang="en-US" dirty="0">
                 <a:ea typeface="MS PGothic" charset="-128"/>
               </a:rPr>
               <a:t>Exploring the </a:t>
             </a:r>
             <a:r>
-              <a:rPr lang="en-US" altLang="en-US">
+              <a:rPr lang="en-US" altLang="en-US" dirty="0">
                 <a:ea typeface="MS PGothic" charset="-128"/>
               </a:rPr>
               <a:t>behavior</a:t>
             </a:r>
             <a:r>
-              <a:rPr lang="en-GB" altLang="en-US">
+              <a:rPr lang="en-GB" altLang="en-US" dirty="0">
                 <a:ea typeface="MS PGothic" charset="-128"/>
               </a:rPr>
               <a:t> of a typical ticket machine.</a:t>
@@ -17664,19 +18398,19 @@
           <a:p>
             <a:pPr lvl="1" eaLnBrk="1" hangingPunct="1"/>
             <a:r>
-              <a:rPr lang="en-GB" altLang="en-US">
+              <a:rPr lang="en-GB" altLang="en-US" dirty="0">
                 <a:ea typeface="MS PGothic" charset="-128"/>
               </a:rPr>
               <a:t>Use the </a:t>
             </a:r>
             <a:r>
-              <a:rPr lang="en-GB" altLang="en-US" i="1">
+              <a:rPr lang="en-GB" altLang="en-US" i="1" dirty="0">
                 <a:ea typeface="MS PGothic" charset="-128"/>
               </a:rPr>
               <a:t>naive-ticket-machine</a:t>
             </a:r>
             <a:r>
-              <a:rPr lang="en-GB" altLang="en-US">
+              <a:rPr lang="en-GB" altLang="en-US" dirty="0">
                 <a:ea typeface="MS PGothic" charset="-128"/>
               </a:rPr>
               <a:t> project.</a:t>
@@ -17685,7 +18419,7 @@
           <a:p>
             <a:pPr lvl="1" eaLnBrk="1" hangingPunct="1"/>
             <a:r>
-              <a:rPr lang="en-GB" altLang="en-US">
+              <a:rPr lang="en-GB" altLang="en-US" dirty="0">
                 <a:ea typeface="MS PGothic" charset="-128"/>
               </a:rPr>
               <a:t>Machines supply tickets of a fixed price.</a:t>
@@ -17694,7 +18428,7 @@
           <a:p>
             <a:pPr lvl="2" eaLnBrk="1" hangingPunct="1"/>
             <a:r>
-              <a:rPr lang="en-GB" altLang="en-US">
+              <a:rPr lang="en-GB" altLang="en-US" dirty="0">
                 <a:ea typeface="MS PGothic" charset="-128"/>
               </a:rPr>
               <a:t>How is that price determined?</a:t>
@@ -17703,40 +18437,40 @@
           <a:p>
             <a:pPr lvl="1" eaLnBrk="1" hangingPunct="1"/>
             <a:r>
-              <a:rPr lang="en-GB" altLang="en-US">
+              <a:rPr lang="en-GB" altLang="en-US" dirty="0">
                 <a:ea typeface="MS PGothic" charset="-128"/>
               </a:rPr>
               <a:t>How is </a:t>
             </a:r>
             <a:r>
-              <a:rPr lang="en-GB" altLang="en-GB">
+              <a:rPr lang="en-GB" altLang="en-GB" dirty="0">
                 <a:ea typeface="MS PGothic" charset="-128"/>
               </a:rPr>
               <a:t>‘</a:t>
             </a:r>
             <a:r>
-              <a:rPr lang="en-GB" altLang="en-US">
+              <a:rPr lang="en-GB" altLang="en-US" dirty="0">
                 <a:ea typeface="MS PGothic" charset="-128"/>
               </a:rPr>
               <a:t>money</a:t>
             </a:r>
             <a:r>
-              <a:rPr lang="en-GB" altLang="en-GB">
+              <a:rPr lang="en-GB" altLang="en-GB" dirty="0">
                 <a:ea typeface="MS PGothic" charset="-128"/>
               </a:rPr>
               <a:t>’</a:t>
             </a:r>
             <a:r>
-              <a:rPr lang="en-GB" altLang="en-US">
+              <a:rPr lang="en-GB" altLang="en-US" dirty="0">
                 <a:ea typeface="MS PGothic" charset="-128"/>
               </a:rPr>
-              <a:t> entered into a machine?</a:t>
+              <a:t> ‘entered’ into a machine?</a:t>
             </a:r>
           </a:p>
           <a:p>
             <a:pPr lvl="1" eaLnBrk="1" hangingPunct="1"/>
             <a:r>
-              <a:rPr lang="en-GB" altLang="en-US">
+              <a:rPr lang="en-GB" altLang="en-US" dirty="0">
                 <a:ea typeface="MS PGothic" charset="-128"/>
               </a:rPr>
               <a:t>How does a machine keep track of the money that is entered?</a:t>
@@ -19236,14 +19970,14 @@
           </a:ln>
           <a:extLst>
             <a:ext uri="{909E8E84-426E-40dd-AFC4-6F175D3DCCD1}">
-              <a14:hiddenFill xmlns="" xmlns:a14="http://schemas.microsoft.com/office/drawing/2010/main">
+              <a14:hiddenFill xmlns:a14="http://schemas.microsoft.com/office/drawing/2010/main" xmlns="">
                 <a:solidFill>
                   <a:srgbClr val="FFFFFF"/>
                 </a:solidFill>
               </a14:hiddenFill>
             </a:ext>
             <a:ext uri="{91240B29-F687-4f45-9708-019B960494DF}">
-              <a14:hiddenLine xmlns="" xmlns:a14="http://schemas.microsoft.com/office/drawing/2010/main" w="9525">
+              <a14:hiddenLine xmlns:a14="http://schemas.microsoft.com/office/drawing/2010/main" xmlns="" w="9525">
                 <a:solidFill>
                   <a:srgbClr val="000000"/>
                 </a:solidFill>
@@ -19547,14 +20281,14 @@
           </a:ln>
           <a:extLst>
             <a:ext uri="{909E8E84-426E-40dd-AFC4-6F175D3DCCD1}">
-              <a14:hiddenFill xmlns="" xmlns:a14="http://schemas.microsoft.com/office/drawing/2010/main">
+              <a14:hiddenFill xmlns:a14="http://schemas.microsoft.com/office/drawing/2010/main" xmlns="">
                 <a:solidFill>
                   <a:srgbClr val="FFFFFF"/>
                 </a:solidFill>
               </a14:hiddenFill>
             </a:ext>
             <a:ext uri="{91240B29-F687-4f45-9708-019B960494DF}">
-              <a14:hiddenLine xmlns="" xmlns:a14="http://schemas.microsoft.com/office/drawing/2010/main" w="9525">
+              <a14:hiddenLine xmlns:a14="http://schemas.microsoft.com/office/drawing/2010/main" xmlns="" w="9525">
                 <a:solidFill>
                   <a:srgbClr val="000000"/>
                 </a:solidFill>
@@ -19913,7 +20647,7 @@
           </a:ln>
           <a:extLst>
             <a:ext uri="{909E8E84-426E-40dd-AFC4-6F175D3DCCD1}">
-              <a14:hiddenFill xmlns="" xmlns:a14="http://schemas.microsoft.com/office/drawing/2010/main">
+              <a14:hiddenFill xmlns:a14="http://schemas.microsoft.com/office/drawing/2010/main" xmlns="">
                 <a:noFill/>
               </a14:hiddenFill>
             </a:ext>
@@ -19954,7 +20688,7 @@
           </a:ln>
           <a:extLst>
             <a:ext uri="{909E8E84-426E-40dd-AFC4-6F175D3DCCD1}">
-              <a14:hiddenFill xmlns="" xmlns:a14="http://schemas.microsoft.com/office/drawing/2010/main">
+              <a14:hiddenFill xmlns:a14="http://schemas.microsoft.com/office/drawing/2010/main" xmlns="">
                 <a:noFill/>
               </a14:hiddenFill>
             </a:ext>
@@ -19997,7 +20731,7 @@
           </a:ln>
           <a:extLst>
             <a:ext uri="{909E8E84-426E-40dd-AFC4-6F175D3DCCD1}">
-              <a14:hiddenFill xmlns="" xmlns:a14="http://schemas.microsoft.com/office/drawing/2010/main">
+              <a14:hiddenFill xmlns:a14="http://schemas.microsoft.com/office/drawing/2010/main" xmlns="">
                 <a:solidFill>
                   <a:srgbClr val="FFFFFF"/>
                 </a:solidFill>
@@ -20157,7 +20891,7 @@
           </a:ln>
           <a:extLst>
             <a:ext uri="{909E8E84-426E-40dd-AFC4-6F175D3DCCD1}">
-              <a14:hiddenFill xmlns="" xmlns:a14="http://schemas.microsoft.com/office/drawing/2010/main">
+              <a14:hiddenFill xmlns:a14="http://schemas.microsoft.com/office/drawing/2010/main" xmlns="">
                 <a:solidFill>
                   <a:srgbClr val="FFFFFF"/>
                 </a:solidFill>
